--- a/Clase_3/PPT/Clase04_Inferencia_OLS.pptx
+++ b/Clase_3/PPT/Clase04_Inferencia_OLS.pptx
@@ -5,7 +5,7 @@
     <p:sldMasterId id="2147483648" r:id="rId1"/>
   </p:sldMasterIdLst>
   <p:notesMasterIdLst>
-    <p:notesMasterId r:id="rId11"/>
+    <p:notesMasterId r:id="rId12"/>
   </p:notesMasterIdLst>
   <p:sldIdLst>
     <p:sldId id="256" r:id="rId2"/>
@@ -15,8 +15,9 @@
     <p:sldId id="260" r:id="rId6"/>
     <p:sldId id="261" r:id="rId7"/>
     <p:sldId id="262" r:id="rId8"/>
-    <p:sldId id="263" r:id="rId9"/>
-    <p:sldId id="264" r:id="rId10"/>
+    <p:sldId id="265" r:id="rId9"/>
+    <p:sldId id="263" r:id="rId10"/>
+    <p:sldId id="264" r:id="rId11"/>
   </p:sldIdLst>
   <p:sldSz cx="9144000" cy="5143500" type="screen16x9"/>
   <p:notesSz cx="5143500" cy="9144000"/>
@@ -329,6 +330,90 @@
 </p:notes>
 </file>
 
+<file path=ppt/notesSlides/notesSlide10.xml><?xml version="1.0" encoding="utf-8"?>
+<p:notes xmlns:a="http://schemas.openxmlformats.org/drawingml/2006/main" xmlns:r="http://schemas.openxmlformats.org/officeDocument/2006/relationships" xmlns:p="http://schemas.openxmlformats.org/presentationml/2006/main">
+  <p:cSld>
+    <p:spTree>
+      <p:nvGrpSpPr>
+        <p:cNvPr id="1" name=""/>
+        <p:cNvGrpSpPr/>
+        <p:nvPr/>
+      </p:nvGrpSpPr>
+      <p:grpSpPr>
+        <a:xfrm>
+          <a:off x="0" y="0"/>
+          <a:ext cx="0" cy="0"/>
+          <a:chOff x="0" y="0"/>
+          <a:chExt cx="0" cy="0"/>
+        </a:xfrm>
+      </p:grpSpPr>
+      <p:sp>
+        <p:nvSpPr>
+          <p:cNvPr id="2" name="Slide Image Placeholder 1"/>
+          <p:cNvSpPr>
+            <a:spLocks noGrp="1" noRot="1" noChangeAspect="1"/>
+          </p:cNvSpPr>
+          <p:nvPr>
+            <p:ph type="sldImg"/>
+          </p:nvPr>
+        </p:nvSpPr>
+        <p:spPr/>
+      </p:sp>
+      <p:sp>
+        <p:nvSpPr>
+          <p:cNvPr id="3" name="Notes Placeholder 2"/>
+          <p:cNvSpPr>
+            <a:spLocks noGrp="1"/>
+          </p:cNvSpPr>
+          <p:nvPr>
+            <p:ph type="body" idx="1"/>
+          </p:nvPr>
+        </p:nvSpPr>
+        <p:spPr/>
+        <p:txBody>
+          <a:bodyPr/>
+          <a:lstStyle/>
+          <a:p>
+            <a:endParaRPr lang="en-US" dirty="0"/>
+          </a:p>
+        </p:txBody>
+      </p:sp>
+      <p:sp>
+        <p:nvSpPr>
+          <p:cNvPr id="4" name="Slide Number Placeholder 3"/>
+          <p:cNvSpPr>
+            <a:spLocks noGrp="1"/>
+          </p:cNvSpPr>
+          <p:nvPr>
+            <p:ph type="sldNum" sz="quarter" idx="10"/>
+          </p:nvPr>
+        </p:nvSpPr>
+        <p:spPr/>
+        <p:txBody>
+          <a:bodyPr/>
+          <a:lstStyle/>
+          <a:p>
+            <a:fld id="{F7021451-1387-4CA6-816F-3879F97B5CBC}" type="slidenum">
+              <a:rPr lang="en-US"/>
+              <a:t>10</a:t>
+            </a:fld>
+            <a:endParaRPr lang="en-US"/>
+          </a:p>
+        </p:txBody>
+      </p:sp>
+    </p:spTree>
+    <p:extLst>
+      <p:ext uri="{BB962C8B-B14F-4D97-AF65-F5344CB8AC3E}">
+        <p14:creationId xmlns:p14="http://schemas.microsoft.com/office/powerpoint/2010/main" val="1024086991"/>
+      </p:ext>
+    </p:extLst>
+  </p:cSld>
+  <p:clrMapOvr>
+    <a:masterClrMapping/>
+  </p:clrMapOvr>
+</p:notes>
+</file>
+
 <file path=ppt/notesSlides/notesSlide2.xml><?xml version="1.0" encoding="utf-8"?>
 <p:notes xmlns:a="http://schemas.openxmlformats.org/drawingml/2006/main" xmlns:r="http://schemas.openxmlformats.org/officeDocument/2006/relationships" xmlns:p="http://schemas.openxmlformats.org/presentationml/2006/main">
   <p:cSld>
@@ -838,7 +923,13 @@
   <p:cSld>
     <p:spTree>
       <p:nvGrpSpPr>
-        <p:cNvPr id="1" name=""/>
+        <p:cNvPr id="1" name="">
+          <a:extLst>
+            <a:ext uri="{FF2B5EF4-FFF2-40B4-BE49-F238E27FC236}">
+              <a16:creationId xmlns:a16="http://schemas.microsoft.com/office/drawing/2014/main" id="{903055C9-5206-C3C0-683C-4BF1BEE95CBA}"/>
+            </a:ext>
+          </a:extLst>
+        </p:cNvPr>
         <p:cNvGrpSpPr/>
         <p:nvPr/>
       </p:nvGrpSpPr>
@@ -852,7 +943,13 @@
       </p:grpSpPr>
       <p:sp>
         <p:nvSpPr>
-          <p:cNvPr id="2" name="Slide Image Placeholder 1"/>
+          <p:cNvPr id="2" name="Slide Image Placeholder 1">
+            <a:extLst>
+              <a:ext uri="{FF2B5EF4-FFF2-40B4-BE49-F238E27FC236}">
+                <a16:creationId xmlns:a16="http://schemas.microsoft.com/office/drawing/2014/main" id="{5E189A75-B933-4B84-423A-E4D329034DBA}"/>
+              </a:ext>
+            </a:extLst>
+          </p:cNvPr>
           <p:cNvSpPr>
             <a:spLocks noGrp="1" noRot="1" noChangeAspect="1"/>
           </p:cNvSpPr>
@@ -864,7 +961,13 @@
       </p:sp>
       <p:sp>
         <p:nvSpPr>
-          <p:cNvPr id="3" name="Notes Placeholder 2"/>
+          <p:cNvPr id="3" name="Notes Placeholder 2">
+            <a:extLst>
+              <a:ext uri="{FF2B5EF4-FFF2-40B4-BE49-F238E27FC236}">
+                <a16:creationId xmlns:a16="http://schemas.microsoft.com/office/drawing/2014/main" id="{20B9A56C-EB36-D1A2-0464-37A3EA7AEC08}"/>
+              </a:ext>
+            </a:extLst>
+          </p:cNvPr>
           <p:cNvSpPr>
             <a:spLocks noGrp="1"/>
           </p:cNvSpPr>
@@ -883,7 +986,13 @@
       </p:sp>
       <p:sp>
         <p:nvSpPr>
-          <p:cNvPr id="4" name="Slide Number Placeholder 3"/>
+          <p:cNvPr id="4" name="Slide Number Placeholder 3">
+            <a:extLst>
+              <a:ext uri="{FF2B5EF4-FFF2-40B4-BE49-F238E27FC236}">
+                <a16:creationId xmlns:a16="http://schemas.microsoft.com/office/drawing/2014/main" id="{9F49663B-DBBD-92EE-6CDC-65915A93F214}"/>
+              </a:ext>
+            </a:extLst>
+          </p:cNvPr>
           <p:cNvSpPr>
             <a:spLocks noGrp="1"/>
           </p:cNvSpPr>
@@ -907,7 +1016,7 @@
     </p:spTree>
     <p:extLst>
       <p:ext uri="{BB962C8B-B14F-4D97-AF65-F5344CB8AC3E}">
-        <p14:creationId xmlns:p14="http://schemas.microsoft.com/office/powerpoint/2010/main" val="1024086991"/>
+        <p14:creationId xmlns:p14="http://schemas.microsoft.com/office/powerpoint/2010/main" val="3220494662"/>
       </p:ext>
     </p:extLst>
   </p:cSld>
@@ -1752,6 +1861,1013 @@
 </p:sld>
 </file>
 
+<file path=ppt/slides/slide10.xml><?xml version="1.0" encoding="utf-8"?>
+<p:sld xmlns:a="http://schemas.openxmlformats.org/drawingml/2006/main" xmlns:r="http://schemas.openxmlformats.org/officeDocument/2006/relationships" xmlns:p="http://schemas.openxmlformats.org/presentationml/2006/main">
+  <p:cSld name="Slide 9">
+    <p:bg>
+      <p:bgPr>
+        <a:solidFill>
+          <a:srgbClr val="FFFFFF"/>
+        </a:solidFill>
+        <a:effectLst/>
+      </p:bgPr>
+    </p:bg>
+    <p:spTree>
+      <p:nvGrpSpPr>
+        <p:cNvPr id="1" name=""/>
+        <p:cNvGrpSpPr/>
+        <p:nvPr/>
+      </p:nvGrpSpPr>
+      <p:grpSpPr>
+        <a:xfrm>
+          <a:off x="0" y="0"/>
+          <a:ext cx="0" cy="0"/>
+          <a:chOff x="0" y="0"/>
+          <a:chExt cx="0" cy="0"/>
+        </a:xfrm>
+      </p:grpSpPr>
+      <p:sp>
+        <p:nvSpPr>
+          <p:cNvPr id="2" name="Shape 0"/>
+          <p:cNvSpPr/>
+          <p:nvPr/>
+        </p:nvSpPr>
+        <p:spPr>
+          <a:xfrm>
+            <a:off x="0" y="0"/>
+            <a:ext cx="3794760" cy="5143500"/>
+          </a:xfrm>
+          <a:prstGeom prst="rect">
+            <a:avLst/>
+          </a:prstGeom>
+          <a:solidFill>
+            <a:srgbClr val="0F3D6E"/>
+          </a:solidFill>
+          <a:ln w="12700">
+            <a:solidFill>
+              <a:srgbClr val="0F3D6E"/>
+            </a:solidFill>
+            <a:prstDash val="solid"/>
+          </a:ln>
+        </p:spPr>
+      </p:sp>
+      <p:sp>
+        <p:nvSpPr>
+          <p:cNvPr id="3" name="Shape 1"/>
+          <p:cNvSpPr/>
+          <p:nvPr/>
+        </p:nvSpPr>
+        <p:spPr>
+          <a:xfrm>
+            <a:off x="3794760" y="0"/>
+            <a:ext cx="50292" cy="5143500"/>
+          </a:xfrm>
+          <a:prstGeom prst="rect">
+            <a:avLst/>
+          </a:prstGeom>
+          <a:solidFill>
+            <a:srgbClr val="5BA4CF"/>
+          </a:solidFill>
+          <a:ln w="12700">
+            <a:solidFill>
+              <a:srgbClr val="5BA4CF"/>
+            </a:solidFill>
+            <a:prstDash val="solid"/>
+          </a:ln>
+        </p:spPr>
+      </p:sp>
+      <p:sp>
+        <p:nvSpPr>
+          <p:cNvPr id="4" name="Shape 2"/>
+          <p:cNvSpPr/>
+          <p:nvPr/>
+        </p:nvSpPr>
+        <p:spPr>
+          <a:xfrm>
+            <a:off x="91440" y="2651760"/>
+            <a:ext cx="3566160" cy="3566160"/>
+          </a:xfrm>
+          <a:prstGeom prst="line">
+            <a:avLst/>
+          </a:prstGeom>
+          <a:solidFill>
+            <a:srgbClr val="2176AE">
+              <a:alpha val="17000"/>
+            </a:srgbClr>
+          </a:solidFill>
+          <a:ln w="12700">
+            <a:solidFill>
+              <a:srgbClr val="C8DEF5">
+                <a:alpha val="28000"/>
+              </a:srgbClr>
+            </a:solidFill>
+            <a:prstDash val="solid"/>
+          </a:ln>
+        </p:spPr>
+      </p:sp>
+      <p:sp>
+        <p:nvSpPr>
+          <p:cNvPr id="5" name="Text 3"/>
+          <p:cNvSpPr/>
+          <p:nvPr/>
+        </p:nvSpPr>
+        <p:spPr>
+          <a:xfrm>
+            <a:off x="320040" y="292608"/>
+            <a:ext cx="3337560" cy="1481328"/>
+          </a:xfrm>
+          <a:prstGeom prst="rect">
+            <a:avLst/>
+          </a:prstGeom>
+          <a:noFill/>
+          <a:ln/>
+        </p:spPr>
+        <p:txBody>
+          <a:bodyPr wrap="square" lIns="0" tIns="0" rIns="0" bIns="0" rtlCol="0" anchor="ctr"/>
+          <a:lstStyle/>
+          <a:p>
+            <a:pPr marL="0" indent="0">
+              <a:lnSpc>
+                <a:spcPct val="108000"/>
+              </a:lnSpc>
+              <a:buNone/>
+            </a:pPr>
+            <a:r>
+              <a:rPr lang="en-US" sz="3000" b="1" dirty="0">
+                <a:solidFill>
+                  <a:srgbClr val="FFFFFF"/>
+                </a:solidFill>
+                <a:latin typeface="Trebuchet MS" pitchFamily="34" charset="0"/>
+                <a:ea typeface="Trebuchet MS" pitchFamily="34" charset="-122"/>
+                <a:cs typeface="Trebuchet MS" pitchFamily="34" charset="-120"/>
+              </a:rPr>
+              <a:t>Módulo 1</a:t>
+            </a:r>
+            <a:endParaRPr lang="en-US" sz="3000" dirty="0"/>
+          </a:p>
+          <a:p>
+            <a:pPr marL="0" indent="0">
+              <a:lnSpc>
+                <a:spcPct val="108000"/>
+              </a:lnSpc>
+              <a:buNone/>
+            </a:pPr>
+            <a:r>
+              <a:rPr lang="en-US" sz="3000" b="1" dirty="0">
+                <a:solidFill>
+                  <a:srgbClr val="FFFFFF"/>
+                </a:solidFill>
+                <a:latin typeface="Trebuchet MS" pitchFamily="34" charset="0"/>
+                <a:ea typeface="Trebuchet MS" pitchFamily="34" charset="-122"/>
+                <a:cs typeface="Trebuchet MS" pitchFamily="34" charset="-120"/>
+              </a:rPr>
+              <a:t>completado ✓</a:t>
+            </a:r>
+            <a:endParaRPr lang="en-US" sz="3000" dirty="0"/>
+          </a:p>
+        </p:txBody>
+      </p:sp>
+      <p:sp>
+        <p:nvSpPr>
+          <p:cNvPr id="6" name="Shape 4"/>
+          <p:cNvSpPr/>
+          <p:nvPr/>
+        </p:nvSpPr>
+        <p:spPr>
+          <a:xfrm>
+            <a:off x="320040" y="1874520"/>
+            <a:ext cx="2286000" cy="0"/>
+          </a:xfrm>
+          <a:prstGeom prst="line">
+            <a:avLst/>
+          </a:prstGeom>
+          <a:noFill/>
+          <a:ln w="19050">
+            <a:solidFill>
+              <a:srgbClr val="5BA4CF"/>
+            </a:solidFill>
+            <a:prstDash val="solid"/>
+          </a:ln>
+        </p:spPr>
+      </p:sp>
+      <p:sp>
+        <p:nvSpPr>
+          <p:cNvPr id="7" name="Text 5"/>
+          <p:cNvSpPr/>
+          <p:nvPr/>
+        </p:nvSpPr>
+        <p:spPr>
+          <a:xfrm>
+            <a:off x="320040" y="2029968"/>
+            <a:ext cx="3337560" cy="256032"/>
+          </a:xfrm>
+          <a:prstGeom prst="rect">
+            <a:avLst/>
+          </a:prstGeom>
+          <a:noFill/>
+          <a:ln/>
+        </p:spPr>
+        <p:txBody>
+          <a:bodyPr wrap="square" lIns="0" tIns="0" rIns="0" bIns="0" rtlCol="0" anchor="ctr"/>
+          <a:lstStyle/>
+          <a:p>
+            <a:pPr marL="0" indent="0">
+              <a:buNone/>
+            </a:pPr>
+            <a:r>
+              <a:rPr lang="en-US" sz="1100" b="1" dirty="0">
+                <a:solidFill>
+                  <a:srgbClr val="5BA4CF"/>
+                </a:solidFill>
+                <a:latin typeface="Calibri" pitchFamily="34" charset="0"/>
+                <a:ea typeface="Calibri" pitchFamily="34" charset="-122"/>
+                <a:cs typeface="Calibri" pitchFamily="34" charset="-120"/>
+              </a:rPr>
+              <a:t>Regresión Lineal</a:t>
+            </a:r>
+            <a:endParaRPr lang="en-US" sz="1100" dirty="0"/>
+          </a:p>
+        </p:txBody>
+      </p:sp>
+      <p:sp>
+        <p:nvSpPr>
+          <p:cNvPr id="8" name="Text 6"/>
+          <p:cNvSpPr/>
+          <p:nvPr/>
+        </p:nvSpPr>
+        <p:spPr>
+          <a:xfrm>
+            <a:off x="320040" y="2322576"/>
+            <a:ext cx="3337560" cy="256032"/>
+          </a:xfrm>
+          <a:prstGeom prst="rect">
+            <a:avLst/>
+          </a:prstGeom>
+          <a:noFill/>
+          <a:ln/>
+        </p:spPr>
+        <p:txBody>
+          <a:bodyPr wrap="square" lIns="0" tIns="0" rIns="0" bIns="0" rtlCol="0" anchor="ctr"/>
+          <a:lstStyle/>
+          <a:p>
+            <a:pPr marL="0" indent="0">
+              <a:buNone/>
+            </a:pPr>
+            <a:r>
+              <a:rPr lang="en-US" sz="1000" dirty="0">
+                <a:solidFill>
+                  <a:srgbClr val="C8DEF5"/>
+                </a:solidFill>
+                <a:latin typeface="Calibri" pitchFamily="34" charset="0"/>
+                <a:ea typeface="Calibri" pitchFamily="34" charset="-122"/>
+                <a:cs typeface="Calibri" pitchFamily="34" charset="-120"/>
+              </a:rPr>
+              <a:t>Docente: Josef Rodriguez</a:t>
+            </a:r>
+            <a:endParaRPr lang="en-US" sz="1000" dirty="0"/>
+          </a:p>
+        </p:txBody>
+      </p:sp>
+      <p:sp>
+        <p:nvSpPr>
+          <p:cNvPr id="9" name="Text 7"/>
+          <p:cNvSpPr/>
+          <p:nvPr/>
+        </p:nvSpPr>
+        <p:spPr>
+          <a:xfrm>
+            <a:off x="4069080" y="274320"/>
+            <a:ext cx="4754880" cy="384048"/>
+          </a:xfrm>
+          <a:prstGeom prst="rect">
+            <a:avLst/>
+          </a:prstGeom>
+          <a:noFill/>
+          <a:ln/>
+        </p:spPr>
+        <p:txBody>
+          <a:bodyPr wrap="square" lIns="0" tIns="0" rIns="0" bIns="0" rtlCol="0" anchor="ctr"/>
+          <a:lstStyle/>
+          <a:p>
+            <a:pPr marL="0" indent="0">
+              <a:buNone/>
+            </a:pPr>
+            <a:r>
+              <a:rPr lang="en-US" sz="1400" b="1" dirty="0">
+                <a:solidFill>
+                  <a:srgbClr val="1A2B3C"/>
+                </a:solidFill>
+                <a:latin typeface="Trebuchet MS" pitchFamily="34" charset="0"/>
+                <a:ea typeface="Trebuchet MS" pitchFamily="34" charset="-122"/>
+                <a:cs typeface="Trebuchet MS" pitchFamily="34" charset="-120"/>
+              </a:rPr>
+              <a:t>3 takeaways del módulo</a:t>
+            </a:r>
+            <a:endParaRPr lang="en-US" sz="1400" dirty="0"/>
+          </a:p>
+        </p:txBody>
+      </p:sp>
+      <p:sp>
+        <p:nvSpPr>
+          <p:cNvPr id="10" name="Shape 8"/>
+          <p:cNvSpPr/>
+          <p:nvPr/>
+        </p:nvSpPr>
+        <p:spPr>
+          <a:xfrm>
+            <a:off x="4069080" y="731520"/>
+            <a:ext cx="4754880" cy="0"/>
+          </a:xfrm>
+          <a:prstGeom prst="line">
+            <a:avLst/>
+          </a:prstGeom>
+          <a:noFill/>
+          <a:ln w="9525">
+            <a:solidFill>
+              <a:srgbClr val="DDE8F2"/>
+            </a:solidFill>
+            <a:prstDash val="solid"/>
+          </a:ln>
+        </p:spPr>
+      </p:sp>
+      <p:sp>
+        <p:nvSpPr>
+          <p:cNvPr id="11" name="Shape 9"/>
+          <p:cNvSpPr/>
+          <p:nvPr/>
+        </p:nvSpPr>
+        <p:spPr>
+          <a:xfrm>
+            <a:off x="4069080" y="914400"/>
+            <a:ext cx="4754880" cy="1115568"/>
+          </a:xfrm>
+          <a:prstGeom prst="rect">
+            <a:avLst/>
+          </a:prstGeom>
+          <a:solidFill>
+            <a:srgbClr val="FFFFFF"/>
+          </a:solidFill>
+          <a:ln w="6350">
+            <a:solidFill>
+              <a:srgbClr val="DDE8F2"/>
+            </a:solidFill>
+            <a:prstDash val="solid"/>
+          </a:ln>
+          <a:effectLst>
+            <a:outerShdw blurRad="101600" dist="38100" dir="8100000" algn="bl" rotWithShape="0">
+              <a:srgbClr val="9EAFC0">
+                <a:alpha val="13000"/>
+              </a:srgbClr>
+            </a:outerShdw>
+          </a:effectLst>
+        </p:spPr>
+      </p:sp>
+      <p:sp>
+        <p:nvSpPr>
+          <p:cNvPr id="12" name="Shape 10"/>
+          <p:cNvSpPr/>
+          <p:nvPr/>
+        </p:nvSpPr>
+        <p:spPr>
+          <a:xfrm>
+            <a:off x="4069080" y="914400"/>
+            <a:ext cx="4754880" cy="50292"/>
+          </a:xfrm>
+          <a:prstGeom prst="rect">
+            <a:avLst/>
+          </a:prstGeom>
+          <a:solidFill>
+            <a:srgbClr val="0F3D6E"/>
+          </a:solidFill>
+          <a:ln w="12700">
+            <a:solidFill>
+              <a:srgbClr val="0F3D6E"/>
+            </a:solidFill>
+            <a:prstDash val="solid"/>
+          </a:ln>
+        </p:spPr>
+      </p:sp>
+      <p:sp>
+        <p:nvSpPr>
+          <p:cNvPr id="13" name="Shape 11"/>
+          <p:cNvSpPr/>
+          <p:nvPr/>
+        </p:nvSpPr>
+        <p:spPr>
+          <a:xfrm>
+            <a:off x="4224528" y="1005840"/>
+            <a:ext cx="475488" cy="475488"/>
+          </a:xfrm>
+          <a:prstGeom prst="rect">
+            <a:avLst/>
+          </a:prstGeom>
+          <a:solidFill>
+            <a:srgbClr val="0F3D6E"/>
+          </a:solidFill>
+          <a:ln w="12700">
+            <a:solidFill>
+              <a:srgbClr val="0F3D6E"/>
+            </a:solidFill>
+            <a:prstDash val="solid"/>
+          </a:ln>
+        </p:spPr>
+      </p:sp>
+      <p:sp>
+        <p:nvSpPr>
+          <p:cNvPr id="14" name="Text 12"/>
+          <p:cNvSpPr/>
+          <p:nvPr/>
+        </p:nvSpPr>
+        <p:spPr>
+          <a:xfrm>
+            <a:off x="4224528" y="1005840"/>
+            <a:ext cx="475488" cy="475488"/>
+          </a:xfrm>
+          <a:prstGeom prst="rect">
+            <a:avLst/>
+          </a:prstGeom>
+          <a:noFill/>
+          <a:ln/>
+        </p:spPr>
+        <p:txBody>
+          <a:bodyPr wrap="square" lIns="0" tIns="0" rIns="0" bIns="0" rtlCol="0" anchor="ctr"/>
+          <a:lstStyle/>
+          <a:p>
+            <a:pPr marL="0" indent="0" algn="ctr">
+              <a:buNone/>
+            </a:pPr>
+            <a:r>
+              <a:rPr lang="en-US" sz="1400" b="1" dirty="0">
+                <a:solidFill>
+                  <a:srgbClr val="FFFFFF"/>
+                </a:solidFill>
+                <a:latin typeface="Trebuchet MS" pitchFamily="34" charset="0"/>
+                <a:ea typeface="Trebuchet MS" pitchFamily="34" charset="-122"/>
+                <a:cs typeface="Trebuchet MS" pitchFamily="34" charset="-120"/>
+              </a:rPr>
+              <a:t>01</a:t>
+            </a:r>
+            <a:endParaRPr lang="en-US" sz="1400" dirty="0"/>
+          </a:p>
+        </p:txBody>
+      </p:sp>
+      <p:sp>
+        <p:nvSpPr>
+          <p:cNvPr id="15" name="Text 13"/>
+          <p:cNvSpPr/>
+          <p:nvPr/>
+        </p:nvSpPr>
+        <p:spPr>
+          <a:xfrm>
+            <a:off x="4828032" y="1024128"/>
+            <a:ext cx="3840480" cy="292608"/>
+          </a:xfrm>
+          <a:prstGeom prst="rect">
+            <a:avLst/>
+          </a:prstGeom>
+          <a:noFill/>
+          <a:ln/>
+        </p:spPr>
+        <p:txBody>
+          <a:bodyPr wrap="square" lIns="0" tIns="0" rIns="0" bIns="0" rtlCol="0" anchor="ctr"/>
+          <a:lstStyle/>
+          <a:p>
+            <a:pPr marL="0" indent="0">
+              <a:buNone/>
+            </a:pPr>
+            <a:r>
+              <a:rPr lang="en-US" sz="1200" b="1" dirty="0">
+                <a:solidFill>
+                  <a:srgbClr val="1A2B3C"/>
+                </a:solidFill>
+                <a:latin typeface="Calibri" pitchFamily="34" charset="0"/>
+                <a:ea typeface="Calibri" pitchFamily="34" charset="-122"/>
+                <a:cs typeface="Calibri" pitchFamily="34" charset="-120"/>
+              </a:rPr>
+              <a:t>El flujo completo</a:t>
+            </a:r>
+            <a:endParaRPr lang="en-US" sz="1200" dirty="0"/>
+          </a:p>
+        </p:txBody>
+      </p:sp>
+      <p:sp>
+        <p:nvSpPr>
+          <p:cNvPr id="16" name="Text 14"/>
+          <p:cNvSpPr/>
+          <p:nvPr/>
+        </p:nvSpPr>
+        <p:spPr>
+          <a:xfrm>
+            <a:off x="4828032" y="1371600"/>
+            <a:ext cx="3840480" cy="566928"/>
+          </a:xfrm>
+          <a:prstGeom prst="rect">
+            <a:avLst/>
+          </a:prstGeom>
+          <a:noFill/>
+          <a:ln/>
+        </p:spPr>
+        <p:txBody>
+          <a:bodyPr wrap="square" lIns="0" tIns="0" rIns="0" bIns="0" rtlCol="0" anchor="ctr"/>
+          <a:lstStyle/>
+          <a:p>
+            <a:pPr marL="0" indent="0">
+              <a:lnSpc>
+                <a:spcPct val="125000"/>
+              </a:lnSpc>
+              <a:buNone/>
+            </a:pPr>
+            <a:r>
+              <a:rPr lang="en-US" sz="950" dirty="0">
+                <a:solidFill>
+                  <a:srgbClr val="7A92A8"/>
+                </a:solidFill>
+                <a:latin typeface="Calibri" pitchFamily="34" charset="0"/>
+                <a:ea typeface="Calibri" pitchFamily="34" charset="-122"/>
+                <a:cs typeface="Calibri" pitchFamily="34" charset="-120"/>
+              </a:rPr>
+              <a:t>Datos → X con intercepto → verificar rango → β̂ = (XᵀX)⁻¹Xᵀy → diagnosticar → reportar</a:t>
+            </a:r>
+            <a:endParaRPr lang="en-US" sz="950" dirty="0"/>
+          </a:p>
+        </p:txBody>
+      </p:sp>
+      <p:sp>
+        <p:nvSpPr>
+          <p:cNvPr id="17" name="Shape 15"/>
+          <p:cNvSpPr/>
+          <p:nvPr/>
+        </p:nvSpPr>
+        <p:spPr>
+          <a:xfrm>
+            <a:off x="4069080" y="2176272"/>
+            <a:ext cx="4754880" cy="1115568"/>
+          </a:xfrm>
+          <a:prstGeom prst="rect">
+            <a:avLst/>
+          </a:prstGeom>
+          <a:solidFill>
+            <a:srgbClr val="FFFFFF"/>
+          </a:solidFill>
+          <a:ln w="6350">
+            <a:solidFill>
+              <a:srgbClr val="DDE8F2"/>
+            </a:solidFill>
+            <a:prstDash val="solid"/>
+          </a:ln>
+          <a:effectLst>
+            <a:outerShdw blurRad="101600" dist="38100" dir="8100000" algn="bl" rotWithShape="0">
+              <a:srgbClr val="9EAFC0">
+                <a:alpha val="13000"/>
+              </a:srgbClr>
+            </a:outerShdw>
+          </a:effectLst>
+        </p:spPr>
+      </p:sp>
+      <p:sp>
+        <p:nvSpPr>
+          <p:cNvPr id="18" name="Shape 16"/>
+          <p:cNvSpPr/>
+          <p:nvPr/>
+        </p:nvSpPr>
+        <p:spPr>
+          <a:xfrm>
+            <a:off x="4069080" y="2176272"/>
+            <a:ext cx="4754880" cy="50292"/>
+          </a:xfrm>
+          <a:prstGeom prst="rect">
+            <a:avLst/>
+          </a:prstGeom>
+          <a:solidFill>
+            <a:srgbClr val="2176AE"/>
+          </a:solidFill>
+          <a:ln w="12700">
+            <a:solidFill>
+              <a:srgbClr val="2176AE"/>
+            </a:solidFill>
+            <a:prstDash val="solid"/>
+          </a:ln>
+        </p:spPr>
+      </p:sp>
+      <p:sp>
+        <p:nvSpPr>
+          <p:cNvPr id="19" name="Shape 17"/>
+          <p:cNvSpPr/>
+          <p:nvPr/>
+        </p:nvSpPr>
+        <p:spPr>
+          <a:xfrm>
+            <a:off x="4224528" y="2267712"/>
+            <a:ext cx="475488" cy="475488"/>
+          </a:xfrm>
+          <a:prstGeom prst="rect">
+            <a:avLst/>
+          </a:prstGeom>
+          <a:solidFill>
+            <a:srgbClr val="2176AE"/>
+          </a:solidFill>
+          <a:ln w="12700">
+            <a:solidFill>
+              <a:srgbClr val="2176AE"/>
+            </a:solidFill>
+            <a:prstDash val="solid"/>
+          </a:ln>
+        </p:spPr>
+      </p:sp>
+      <p:sp>
+        <p:nvSpPr>
+          <p:cNvPr id="20" name="Text 18"/>
+          <p:cNvSpPr/>
+          <p:nvPr/>
+        </p:nvSpPr>
+        <p:spPr>
+          <a:xfrm>
+            <a:off x="4224528" y="2267712"/>
+            <a:ext cx="475488" cy="475488"/>
+          </a:xfrm>
+          <a:prstGeom prst="rect">
+            <a:avLst/>
+          </a:prstGeom>
+          <a:noFill/>
+          <a:ln/>
+        </p:spPr>
+        <p:txBody>
+          <a:bodyPr wrap="square" lIns="0" tIns="0" rIns="0" bIns="0" rtlCol="0" anchor="ctr"/>
+          <a:lstStyle/>
+          <a:p>
+            <a:pPr marL="0" indent="0" algn="ctr">
+              <a:buNone/>
+            </a:pPr>
+            <a:r>
+              <a:rPr lang="en-US" sz="1400" b="1" dirty="0">
+                <a:solidFill>
+                  <a:srgbClr val="FFFFFF"/>
+                </a:solidFill>
+                <a:latin typeface="Trebuchet MS" pitchFamily="34" charset="0"/>
+                <a:ea typeface="Trebuchet MS" pitchFamily="34" charset="-122"/>
+                <a:cs typeface="Trebuchet MS" pitchFamily="34" charset="-120"/>
+              </a:rPr>
+              <a:t>02</a:t>
+            </a:r>
+            <a:endParaRPr lang="en-US" sz="1400" dirty="0"/>
+          </a:p>
+        </p:txBody>
+      </p:sp>
+      <p:sp>
+        <p:nvSpPr>
+          <p:cNvPr id="21" name="Text 19"/>
+          <p:cNvSpPr/>
+          <p:nvPr/>
+        </p:nvSpPr>
+        <p:spPr>
+          <a:xfrm>
+            <a:off x="4828032" y="2286000"/>
+            <a:ext cx="3840480" cy="292608"/>
+          </a:xfrm>
+          <a:prstGeom prst="rect">
+            <a:avLst/>
+          </a:prstGeom>
+          <a:noFill/>
+          <a:ln/>
+        </p:spPr>
+        <p:txBody>
+          <a:bodyPr wrap="square" lIns="0" tIns="0" rIns="0" bIns="0" rtlCol="0" anchor="ctr"/>
+          <a:lstStyle/>
+          <a:p>
+            <a:pPr marL="0" indent="0">
+              <a:buNone/>
+            </a:pPr>
+            <a:r>
+              <a:rPr lang="en-US" sz="1200" b="1" dirty="0">
+                <a:solidFill>
+                  <a:srgbClr val="1A2B3C"/>
+                </a:solidFill>
+                <a:latin typeface="Calibri" pitchFamily="34" charset="0"/>
+                <a:ea typeface="Calibri" pitchFamily="34" charset="-122"/>
+                <a:cs typeface="Calibri" pitchFamily="34" charset="-120"/>
+              </a:rPr>
+              <a:t>Diagnóstico es obligatorio</a:t>
+            </a:r>
+            <a:endParaRPr lang="en-US" sz="1200" dirty="0"/>
+          </a:p>
+        </p:txBody>
+      </p:sp>
+      <p:sp>
+        <p:nvSpPr>
+          <p:cNvPr id="22" name="Text 20"/>
+          <p:cNvSpPr/>
+          <p:nvPr/>
+        </p:nvSpPr>
+        <p:spPr>
+          <a:xfrm>
+            <a:off x="4828032" y="2633472"/>
+            <a:ext cx="3840480" cy="566928"/>
+          </a:xfrm>
+          <a:prstGeom prst="rect">
+            <a:avLst/>
+          </a:prstGeom>
+          <a:noFill/>
+          <a:ln/>
+        </p:spPr>
+        <p:txBody>
+          <a:bodyPr wrap="square" lIns="0" tIns="0" rIns="0" bIns="0" rtlCol="0" anchor="ctr"/>
+          <a:lstStyle/>
+          <a:p>
+            <a:pPr marL="0" indent="0">
+              <a:lnSpc>
+                <a:spcPct val="125000"/>
+              </a:lnSpc>
+              <a:buNone/>
+            </a:pPr>
+            <a:r>
+              <a:rPr lang="en-US" sz="950" dirty="0">
+                <a:solidFill>
+                  <a:srgbClr val="7A92A8"/>
+                </a:solidFill>
+                <a:latin typeface="Calibri" pitchFamily="34" charset="0"/>
+                <a:ea typeface="Calibri" pitchFamily="34" charset="-122"/>
+                <a:cs typeface="Calibri" pitchFamily="34" charset="-120"/>
+              </a:rPr>
+              <a:t>Sin los 4 gráficos + 3 tests no podés concluir que el modelo es válido</a:t>
+            </a:r>
+            <a:endParaRPr lang="en-US" sz="950" dirty="0"/>
+          </a:p>
+        </p:txBody>
+      </p:sp>
+      <p:sp>
+        <p:nvSpPr>
+          <p:cNvPr id="23" name="Shape 21"/>
+          <p:cNvSpPr/>
+          <p:nvPr/>
+        </p:nvSpPr>
+        <p:spPr>
+          <a:xfrm>
+            <a:off x="4069080" y="3438144"/>
+            <a:ext cx="4754880" cy="1115568"/>
+          </a:xfrm>
+          <a:prstGeom prst="rect">
+            <a:avLst/>
+          </a:prstGeom>
+          <a:solidFill>
+            <a:srgbClr val="FFFFFF"/>
+          </a:solidFill>
+          <a:ln w="6350">
+            <a:solidFill>
+              <a:srgbClr val="DDE8F2"/>
+            </a:solidFill>
+            <a:prstDash val="solid"/>
+          </a:ln>
+          <a:effectLst>
+            <a:outerShdw blurRad="101600" dist="38100" dir="8100000" algn="bl" rotWithShape="0">
+              <a:srgbClr val="9EAFC0">
+                <a:alpha val="13000"/>
+              </a:srgbClr>
+            </a:outerShdw>
+          </a:effectLst>
+        </p:spPr>
+      </p:sp>
+      <p:sp>
+        <p:nvSpPr>
+          <p:cNvPr id="24" name="Shape 22"/>
+          <p:cNvSpPr/>
+          <p:nvPr/>
+        </p:nvSpPr>
+        <p:spPr>
+          <a:xfrm>
+            <a:off x="4069080" y="3438144"/>
+            <a:ext cx="4754880" cy="50292"/>
+          </a:xfrm>
+          <a:prstGeom prst="rect">
+            <a:avLst/>
+          </a:prstGeom>
+          <a:solidFill>
+            <a:srgbClr val="5BA4CF"/>
+          </a:solidFill>
+          <a:ln w="12700">
+            <a:solidFill>
+              <a:srgbClr val="5BA4CF"/>
+            </a:solidFill>
+            <a:prstDash val="solid"/>
+          </a:ln>
+        </p:spPr>
+      </p:sp>
+      <p:sp>
+        <p:nvSpPr>
+          <p:cNvPr id="25" name="Shape 23"/>
+          <p:cNvSpPr/>
+          <p:nvPr/>
+        </p:nvSpPr>
+        <p:spPr>
+          <a:xfrm>
+            <a:off x="4224528" y="3529584"/>
+            <a:ext cx="475488" cy="475488"/>
+          </a:xfrm>
+          <a:prstGeom prst="rect">
+            <a:avLst/>
+          </a:prstGeom>
+          <a:solidFill>
+            <a:srgbClr val="5BA4CF"/>
+          </a:solidFill>
+          <a:ln w="12700">
+            <a:solidFill>
+              <a:srgbClr val="5BA4CF"/>
+            </a:solidFill>
+            <a:prstDash val="solid"/>
+          </a:ln>
+        </p:spPr>
+      </p:sp>
+      <p:sp>
+        <p:nvSpPr>
+          <p:cNvPr id="26" name="Text 24"/>
+          <p:cNvSpPr/>
+          <p:nvPr/>
+        </p:nvSpPr>
+        <p:spPr>
+          <a:xfrm>
+            <a:off x="4224528" y="3529584"/>
+            <a:ext cx="475488" cy="475488"/>
+          </a:xfrm>
+          <a:prstGeom prst="rect">
+            <a:avLst/>
+          </a:prstGeom>
+          <a:noFill/>
+          <a:ln/>
+        </p:spPr>
+        <p:txBody>
+          <a:bodyPr wrap="square" lIns="0" tIns="0" rIns="0" bIns="0" rtlCol="0" anchor="ctr"/>
+          <a:lstStyle/>
+          <a:p>
+            <a:pPr marL="0" indent="0" algn="ctr">
+              <a:buNone/>
+            </a:pPr>
+            <a:r>
+              <a:rPr lang="en-US" sz="1400" b="1" dirty="0">
+                <a:solidFill>
+                  <a:srgbClr val="FFFFFF"/>
+                </a:solidFill>
+                <a:latin typeface="Trebuchet MS" pitchFamily="34" charset="0"/>
+                <a:ea typeface="Trebuchet MS" pitchFamily="34" charset="-122"/>
+                <a:cs typeface="Trebuchet MS" pitchFamily="34" charset="-120"/>
+              </a:rPr>
+              <a:t>03</a:t>
+            </a:r>
+            <a:endParaRPr lang="en-US" sz="1400" dirty="0"/>
+          </a:p>
+        </p:txBody>
+      </p:sp>
+      <p:sp>
+        <p:nvSpPr>
+          <p:cNvPr id="27" name="Text 25"/>
+          <p:cNvSpPr/>
+          <p:nvPr/>
+        </p:nvSpPr>
+        <p:spPr>
+          <a:xfrm>
+            <a:off x="4828032" y="3547872"/>
+            <a:ext cx="3840480" cy="292608"/>
+          </a:xfrm>
+          <a:prstGeom prst="rect">
+            <a:avLst/>
+          </a:prstGeom>
+          <a:noFill/>
+          <a:ln/>
+        </p:spPr>
+        <p:txBody>
+          <a:bodyPr wrap="square" lIns="0" tIns="0" rIns="0" bIns="0" rtlCol="0" anchor="ctr"/>
+          <a:lstStyle/>
+          <a:p>
+            <a:pPr marL="0" indent="0">
+              <a:buNone/>
+            </a:pPr>
+            <a:r>
+              <a:rPr lang="en-US" sz="1200" b="1" dirty="0">
+                <a:solidFill>
+                  <a:srgbClr val="1A2B3C"/>
+                </a:solidFill>
+                <a:latin typeface="Calibri" pitchFamily="34" charset="0"/>
+                <a:ea typeface="Calibri" pitchFamily="34" charset="-122"/>
+                <a:cs typeface="Calibri" pitchFamily="34" charset="-120"/>
+              </a:rPr>
+              <a:t>R²_adj + F primero, t-tests después</a:t>
+            </a:r>
+            <a:endParaRPr lang="en-US" sz="1200" dirty="0"/>
+          </a:p>
+        </p:txBody>
+      </p:sp>
+      <p:sp>
+        <p:nvSpPr>
+          <p:cNvPr id="28" name="Text 26"/>
+          <p:cNvSpPr/>
+          <p:nvPr/>
+        </p:nvSpPr>
+        <p:spPr>
+          <a:xfrm>
+            <a:off x="4828032" y="3895344"/>
+            <a:ext cx="3840480" cy="566928"/>
+          </a:xfrm>
+          <a:prstGeom prst="rect">
+            <a:avLst/>
+          </a:prstGeom>
+          <a:noFill/>
+          <a:ln/>
+        </p:spPr>
+        <p:txBody>
+          <a:bodyPr wrap="square" lIns="0" tIns="0" rIns="0" bIns="0" rtlCol="0" anchor="ctr"/>
+          <a:lstStyle/>
+          <a:p>
+            <a:pPr marL="0" indent="0">
+              <a:lnSpc>
+                <a:spcPct val="125000"/>
+              </a:lnSpc>
+              <a:buNone/>
+            </a:pPr>
+            <a:r>
+              <a:rPr lang="en-US" sz="950" dirty="0">
+                <a:solidFill>
+                  <a:srgbClr val="7A92A8"/>
+                </a:solidFill>
+                <a:latin typeface="Calibri" pitchFamily="34" charset="0"/>
+                <a:ea typeface="Calibri" pitchFamily="34" charset="-122"/>
+                <a:cs typeface="Calibri" pitchFamily="34" charset="-120"/>
+              </a:rPr>
+              <a:t>Primero ver si el modelo global tiene sentido. Luego interpretar coeficientes.</a:t>
+            </a:r>
+            <a:endParaRPr lang="en-US" sz="950" dirty="0"/>
+          </a:p>
+        </p:txBody>
+      </p:sp>
+      <p:sp>
+        <p:nvSpPr>
+          <p:cNvPr id="29" name="Shape 27"/>
+          <p:cNvSpPr/>
+          <p:nvPr/>
+        </p:nvSpPr>
+        <p:spPr>
+          <a:xfrm>
+            <a:off x="4069080" y="4645152"/>
+            <a:ext cx="4754880" cy="347472"/>
+          </a:xfrm>
+          <a:prstGeom prst="rect">
+            <a:avLst/>
+          </a:prstGeom>
+          <a:solidFill>
+            <a:srgbClr val="EAF2FB"/>
+          </a:solidFill>
+          <a:ln w="6350">
+            <a:solidFill>
+              <a:srgbClr val="C8DEF5"/>
+            </a:solidFill>
+            <a:prstDash val="solid"/>
+          </a:ln>
+        </p:spPr>
+      </p:sp>
+      <p:sp>
+        <p:nvSpPr>
+          <p:cNvPr id="30" name="Text 28"/>
+          <p:cNvSpPr/>
+          <p:nvPr/>
+        </p:nvSpPr>
+        <p:spPr>
+          <a:xfrm>
+            <a:off x="4224528" y="4700016"/>
+            <a:ext cx="4462272" cy="237744"/>
+          </a:xfrm>
+          <a:prstGeom prst="rect">
+            <a:avLst/>
+          </a:prstGeom>
+          <a:noFill/>
+          <a:ln/>
+        </p:spPr>
+        <p:txBody>
+          <a:bodyPr wrap="square" lIns="0" tIns="0" rIns="0" bIns="0" rtlCol="0" anchor="ctr"/>
+          <a:lstStyle/>
+          <a:p>
+            <a:pPr marL="0" indent="0">
+              <a:buNone/>
+            </a:pPr>
+            <a:r>
+              <a:rPr lang="en-US" sz="900" dirty="0">
+                <a:solidFill>
+                  <a:srgbClr val="2176AE"/>
+                </a:solidFill>
+                <a:latin typeface="Calibri" pitchFamily="34" charset="0"/>
+                <a:ea typeface="Calibri" pitchFamily="34" charset="-122"/>
+                <a:cs typeface="Calibri" pitchFamily="34" charset="-120"/>
+              </a:rPr>
+              <a:t>Próximo módulo → Regresión Logística: Clase 5 · Formulación desde el GLM · Función logit · Log-verosimilitud</a:t>
+            </a:r>
+            <a:endParaRPr lang="en-US" sz="900" dirty="0"/>
+          </a:p>
+        </p:txBody>
+      </p:sp>
+    </p:spTree>
+  </p:cSld>
+  <p:clrMapOvr>
+    <a:masterClrMapping/>
+  </p:clrMapOvr>
+</p:sld>
+</file>
+
 <file path=ppt/slides/slide2.xml><?xml version="1.0" encoding="utf-8"?>
 <p:sld xmlns:a="http://schemas.openxmlformats.org/drawingml/2006/main" xmlns:r="http://schemas.openxmlformats.org/officeDocument/2006/relationships" xmlns:p="http://schemas.openxmlformats.org/presentationml/2006/main">
   <p:cSld name="Slide 2">
@@ -7686,7 +8802,29 @@
                 <a:ea typeface="Courier New" pitchFamily="34" charset="-122"/>
                 <a:cs typeface="Courier New" pitchFamily="34" charset="-120"/>
               </a:rPr>
-              <a:t>0,05 no </a:t>
+              <a:t>0,05 </a:t>
+            </a:r>
+            <a:r>
+              <a:rPr lang="en-US" sz="900" b="1" dirty="0">
+                <a:solidFill>
+                  <a:srgbClr val="C00000"/>
+                </a:solidFill>
+                <a:latin typeface="Courier New" pitchFamily="34" charset="0"/>
+                <a:ea typeface="Courier New" pitchFamily="34" charset="-122"/>
+                <a:cs typeface="Courier New" pitchFamily="34" charset="-120"/>
+              </a:rPr>
+              <a:t>no</a:t>
+            </a:r>
+            <a:r>
+              <a:rPr lang="en-US" sz="900" b="1" dirty="0">
+                <a:solidFill>
+                  <a:srgbClr val="0F3D6E"/>
+                </a:solidFill>
+                <a:latin typeface="Courier New" pitchFamily="34" charset="0"/>
+                <a:ea typeface="Courier New" pitchFamily="34" charset="-122"/>
+                <a:cs typeface="Courier New" pitchFamily="34" charset="-120"/>
+              </a:rPr>
+              <a:t> </a:t>
             </a:r>
             <a:r>
               <a:rPr lang="en-US" sz="900" b="1" dirty="0" err="1">
@@ -7874,9 +9012,41 @@
                 <a:ea typeface="Trebuchet MS" pitchFamily="34" charset="-122"/>
                 <a:cs typeface="Trebuchet MS" pitchFamily="34" charset="-120"/>
               </a:rPr>
-              <a:t>t-tests e Intervalos de Confianza por β̂ⱼ</a:t>
-            </a:r>
-            <a:endParaRPr lang="en-US" sz="2100" dirty="0"/>
+              <a:t>t-tests e Intervalos de Confianza por β̂ⱼ </a:t>
+            </a:r>
+          </a:p>
+          <a:p>
+            <a:pPr marL="0" indent="0">
+              <a:buNone/>
+            </a:pPr>
+            <a:r>
+              <a:rPr lang="en-US" sz="1200" b="1" dirty="0">
+                <a:solidFill>
+                  <a:srgbClr val="1A2B3C"/>
+                </a:solidFill>
+                <a:latin typeface="Trebuchet MS" pitchFamily="34" charset="0"/>
+              </a:rPr>
+              <a:t>¿Cada variable </a:t>
+            </a:r>
+            <a:r>
+              <a:rPr lang="en-US" sz="1200" b="1" dirty="0" err="1">
+                <a:solidFill>
+                  <a:srgbClr val="1A2B3C"/>
+                </a:solidFill>
+                <a:latin typeface="Trebuchet MS" pitchFamily="34" charset="0"/>
+              </a:rPr>
+              <a:t>aporta</a:t>
+            </a:r>
+            <a:r>
+              <a:rPr lang="en-US" sz="1200" b="1" dirty="0">
+                <a:solidFill>
+                  <a:srgbClr val="1A2B3C"/>
+                </a:solidFill>
+                <a:latin typeface="Trebuchet MS" pitchFamily="34" charset="0"/>
+              </a:rPr>
+              <a:t>?</a:t>
+            </a:r>
+            <a:endParaRPr lang="en-US" sz="1200" dirty="0"/>
           </a:p>
         </p:txBody>
       </p:sp>
@@ -8410,21 +9580,22 @@
         </p:nvSpPr>
         <p:spPr>
           <a:xfrm>
-            <a:off x="1783080" y="4114800"/>
-            <a:ext cx="2286000" cy="237744"/>
-          </a:xfrm>
-          <a:prstGeom prst="rect">
-            <a:avLst/>
-          </a:prstGeom>
-          <a:noFill/>
-          <a:ln/>
-        </p:spPr>
-        <p:txBody>
-          <a:bodyPr wrap="square" lIns="0" tIns="0" rIns="0" bIns="0" rtlCol="0" anchor="ctr"/>
-          <a:lstStyle/>
-          <a:p>
-            <a:pPr marL="0" indent="0">
-              <a:buNone/>
+            <a:off x="1783080" y="4239748"/>
+            <a:ext cx="2377440" cy="237744"/>
+          </a:xfrm>
+          <a:prstGeom prst="rect">
+            <a:avLst/>
+          </a:prstGeom>
+          <a:noFill/>
+          <a:ln/>
+        </p:spPr>
+        <p:txBody>
+          <a:bodyPr wrap="square" lIns="0" tIns="0" rIns="0" bIns="0" rtlCol="0" anchor="ctr"/>
+          <a:lstStyle/>
+          <a:p>
+            <a:pPr marL="171450" indent="-171450">
+              <a:buFont typeface="Arial" panose="020B0604020202020204" pitchFamily="34" charset="0"/>
+              <a:buChar char="•"/>
             </a:pPr>
             <a:r>
               <a:rPr lang="en-US" sz="950" dirty="0">
@@ -8437,7 +9608,91 @@
               </a:rPr>
               <a:t>***p&lt;0.001  **p&lt;0.01  *p&lt;0.05</a:t>
             </a:r>
-            <a:endParaRPr lang="en-US" sz="950" dirty="0"/>
+          </a:p>
+          <a:p>
+            <a:pPr marL="171450" indent="-171450">
+              <a:buFont typeface="Arial" panose="020B0604020202020204" pitchFamily="34" charset="0"/>
+              <a:buChar char="•"/>
+            </a:pPr>
+            <a:r>
+              <a:rPr lang="en-US" sz="950" b="1" dirty="0">
+                <a:solidFill>
+                  <a:srgbClr val="7A92A8"/>
+                </a:solidFill>
+                <a:latin typeface="Courier New" pitchFamily="34" charset="0"/>
+                <a:cs typeface="Courier New" pitchFamily="34" charset="-120"/>
+              </a:rPr>
+              <a:t>P</a:t>
+            </a:r>
+            <a:r>
+              <a:rPr lang="en-US" sz="950" b="1" dirty="0">
+                <a:solidFill>
+                  <a:srgbClr val="7A92A8"/>
+                </a:solidFill>
+                <a:latin typeface="Courier New" pitchFamily="34" charset="0"/>
+                <a:ea typeface="Courier New" pitchFamily="34" charset="-122"/>
+                <a:cs typeface="Courier New" pitchFamily="34" charset="-120"/>
+              </a:rPr>
+              <a:t> &lt; 0,05 es </a:t>
+            </a:r>
+            <a:r>
+              <a:rPr lang="en-US" sz="950" b="1" dirty="0" err="1">
+                <a:solidFill>
+                  <a:srgbClr val="7A92A8"/>
+                </a:solidFill>
+                <a:latin typeface="Courier New" pitchFamily="34" charset="0"/>
+                <a:ea typeface="Courier New" pitchFamily="34" charset="-122"/>
+                <a:cs typeface="Courier New" pitchFamily="34" charset="-120"/>
+              </a:rPr>
+              <a:t>significativo</a:t>
+            </a:r>
+            <a:endParaRPr lang="en-US" sz="950" b="1" dirty="0">
+              <a:solidFill>
+                <a:srgbClr val="7A92A8"/>
+              </a:solidFill>
+              <a:latin typeface="Courier New" pitchFamily="34" charset="0"/>
+              <a:ea typeface="Courier New" pitchFamily="34" charset="-122"/>
+              <a:cs typeface="Courier New" pitchFamily="34" charset="-120"/>
+            </a:endParaRPr>
+          </a:p>
+          <a:p>
+            <a:pPr marL="171450" indent="-171450">
+              <a:buFont typeface="Arial" panose="020B0604020202020204" pitchFamily="34" charset="0"/>
+              <a:buChar char="•"/>
+            </a:pPr>
+            <a:r>
+              <a:rPr lang="en-US" sz="950" b="1" dirty="0">
+                <a:solidFill>
+                  <a:srgbClr val="7A92A8"/>
+                </a:solidFill>
+                <a:latin typeface="Courier New" pitchFamily="34" charset="0"/>
+                <a:cs typeface="Courier New" pitchFamily="34" charset="-120"/>
+              </a:rPr>
+              <a:t>P </a:t>
+            </a:r>
+            <a:r>
+              <a:rPr lang="en-US" sz="950" b="1" dirty="0">
+                <a:solidFill>
+                  <a:srgbClr val="7A92A8"/>
+                </a:solidFill>
+                <a:latin typeface="Courier New" pitchFamily="34" charset="0"/>
+                <a:ea typeface="Courier New" pitchFamily="34" charset="-122"/>
+                <a:cs typeface="Courier New" pitchFamily="34" charset="-120"/>
+              </a:rPr>
+              <a:t>&gt;= 0,05 no es </a:t>
+            </a:r>
+            <a:r>
+              <a:rPr lang="en-US" sz="950" b="1" dirty="0" err="1">
+                <a:solidFill>
+                  <a:srgbClr val="7A92A8"/>
+                </a:solidFill>
+                <a:latin typeface="Courier New" pitchFamily="34" charset="0"/>
+                <a:ea typeface="Courier New" pitchFamily="34" charset="-122"/>
+                <a:cs typeface="Courier New" pitchFamily="34" charset="-120"/>
+              </a:rPr>
+              <a:t>significativo</a:t>
+            </a:r>
+            <a:endParaRPr lang="en-US" sz="950" b="1" dirty="0"/>
           </a:p>
         </p:txBody>
       </p:sp>
@@ -12181,6 +13436,1502 @@
 
 <file path=ppt/slides/slide8.xml><?xml version="1.0" encoding="utf-8"?>
 <p:sld xmlns:a="http://schemas.openxmlformats.org/drawingml/2006/main" xmlns:r="http://schemas.openxmlformats.org/officeDocument/2006/relationships" xmlns:p="http://schemas.openxmlformats.org/presentationml/2006/main">
+  <p:cSld>
+    <p:spTree>
+      <p:nvGrpSpPr>
+        <p:cNvPr id="1" name="">
+          <a:extLst>
+            <a:ext uri="{FF2B5EF4-FFF2-40B4-BE49-F238E27FC236}">
+              <a16:creationId xmlns:a16="http://schemas.microsoft.com/office/drawing/2014/main" id="{CC29778E-FE44-48EB-EBB5-6B8E1CCCEA8F}"/>
+            </a:ext>
+          </a:extLst>
+        </p:cNvPr>
+        <p:cNvGrpSpPr/>
+        <p:nvPr/>
+      </p:nvGrpSpPr>
+      <p:grpSpPr>
+        <a:xfrm>
+          <a:off x="0" y="0"/>
+          <a:ext cx="0" cy="0"/>
+          <a:chOff x="0" y="0"/>
+          <a:chExt cx="0" cy="0"/>
+        </a:xfrm>
+      </p:grpSpPr>
+      <p:sp>
+        <p:nvSpPr>
+          <p:cNvPr id="38" name="Shape 1">
+            <a:extLst>
+              <a:ext uri="{FF2B5EF4-FFF2-40B4-BE49-F238E27FC236}">
+                <a16:creationId xmlns:a16="http://schemas.microsoft.com/office/drawing/2014/main" id="{0596642E-6886-6EF6-E9E0-2E55422ED4BA}"/>
+              </a:ext>
+            </a:extLst>
+          </p:cNvPr>
+          <p:cNvSpPr/>
+          <p:nvPr/>
+        </p:nvSpPr>
+        <p:spPr>
+          <a:xfrm>
+            <a:off x="773527" y="1223785"/>
+            <a:ext cx="3227740" cy="362440"/>
+          </a:xfrm>
+          <a:prstGeom prst="rect">
+            <a:avLst/>
+          </a:prstGeom>
+          <a:solidFill>
+            <a:srgbClr val="5BA4CF"/>
+          </a:solidFill>
+          <a:ln w="12700">
+            <a:solidFill>
+              <a:srgbClr val="5BA4CF"/>
+            </a:solidFill>
+            <a:prstDash val="solid"/>
+          </a:ln>
+        </p:spPr>
+      </p:sp>
+      <p:sp>
+        <p:nvSpPr>
+          <p:cNvPr id="2" name="Shape 0">
+            <a:extLst>
+              <a:ext uri="{FF2B5EF4-FFF2-40B4-BE49-F238E27FC236}">
+                <a16:creationId xmlns:a16="http://schemas.microsoft.com/office/drawing/2014/main" id="{C2452E0B-804D-0EB2-014B-06B6E2F4C669}"/>
+              </a:ext>
+            </a:extLst>
+          </p:cNvPr>
+          <p:cNvSpPr/>
+          <p:nvPr/>
+        </p:nvSpPr>
+        <p:spPr>
+          <a:xfrm>
+            <a:off x="0" y="0"/>
+            <a:ext cx="9144000" cy="960120"/>
+          </a:xfrm>
+          <a:prstGeom prst="rect">
+            <a:avLst/>
+          </a:prstGeom>
+          <a:solidFill>
+            <a:srgbClr val="EAF2FB"/>
+          </a:solidFill>
+          <a:ln w="12700">
+            <a:solidFill>
+              <a:srgbClr val="EAF2FB"/>
+            </a:solidFill>
+            <a:prstDash val="solid"/>
+          </a:ln>
+        </p:spPr>
+      </p:sp>
+      <p:sp>
+        <p:nvSpPr>
+          <p:cNvPr id="3" name="Shape 1">
+            <a:extLst>
+              <a:ext uri="{FF2B5EF4-FFF2-40B4-BE49-F238E27FC236}">
+                <a16:creationId xmlns:a16="http://schemas.microsoft.com/office/drawing/2014/main" id="{A15F4AF5-ACB8-8B44-78B4-77E983866C72}"/>
+              </a:ext>
+            </a:extLst>
+          </p:cNvPr>
+          <p:cNvSpPr/>
+          <p:nvPr/>
+        </p:nvSpPr>
+        <p:spPr>
+          <a:xfrm>
+            <a:off x="0" y="0"/>
+            <a:ext cx="50292" cy="960120"/>
+          </a:xfrm>
+          <a:prstGeom prst="rect">
+            <a:avLst/>
+          </a:prstGeom>
+          <a:solidFill>
+            <a:srgbClr val="5BA4CF"/>
+          </a:solidFill>
+          <a:ln w="12700">
+            <a:solidFill>
+              <a:srgbClr val="5BA4CF"/>
+            </a:solidFill>
+            <a:prstDash val="solid"/>
+          </a:ln>
+        </p:spPr>
+      </p:sp>
+      <p:sp>
+        <p:nvSpPr>
+          <p:cNvPr id="4" name="Text 2">
+            <a:extLst>
+              <a:ext uri="{FF2B5EF4-FFF2-40B4-BE49-F238E27FC236}">
+                <a16:creationId xmlns:a16="http://schemas.microsoft.com/office/drawing/2014/main" id="{8D5D90FB-50AD-70FB-E52E-BD2DD954AA3C}"/>
+              </a:ext>
+            </a:extLst>
+          </p:cNvPr>
+          <p:cNvSpPr/>
+          <p:nvPr/>
+        </p:nvSpPr>
+        <p:spPr>
+          <a:xfrm>
+            <a:off x="411480" y="146304"/>
+            <a:ext cx="502920" cy="320040"/>
+          </a:xfrm>
+          <a:prstGeom prst="rect">
+            <a:avLst/>
+          </a:prstGeom>
+          <a:noFill/>
+          <a:ln/>
+        </p:spPr>
+        <p:txBody>
+          <a:bodyPr wrap="square" lIns="0" tIns="0" rIns="0" bIns="0" rtlCol="0" anchor="ctr"/>
+          <a:lstStyle/>
+          <a:p>
+            <a:pPr marL="0" indent="0">
+              <a:buNone/>
+            </a:pPr>
+            <a:r>
+              <a:rPr lang="en-US" sz="1100" b="1" dirty="0">
+                <a:solidFill>
+                  <a:srgbClr val="2176AE"/>
+                </a:solidFill>
+                <a:latin typeface="Calibri" pitchFamily="34" charset="0"/>
+                <a:ea typeface="Calibri" pitchFamily="34" charset="-122"/>
+                <a:cs typeface="Calibri" pitchFamily="34" charset="-120"/>
+              </a:rPr>
+              <a:t>06</a:t>
+            </a:r>
+            <a:endParaRPr lang="en-US" sz="1100" dirty="0"/>
+          </a:p>
+        </p:txBody>
+      </p:sp>
+      <p:sp>
+        <p:nvSpPr>
+          <p:cNvPr id="5" name="Text 3">
+            <a:extLst>
+              <a:ext uri="{FF2B5EF4-FFF2-40B4-BE49-F238E27FC236}">
+                <a16:creationId xmlns:a16="http://schemas.microsoft.com/office/drawing/2014/main" id="{48F551AC-5586-1F6A-6023-E7160729B5E5}"/>
+              </a:ext>
+            </a:extLst>
+          </p:cNvPr>
+          <p:cNvSpPr/>
+          <p:nvPr/>
+        </p:nvSpPr>
+        <p:spPr>
+          <a:xfrm>
+            <a:off x="960120" y="182880"/>
+            <a:ext cx="7772400" cy="502920"/>
+          </a:xfrm>
+          <a:prstGeom prst="rect">
+            <a:avLst/>
+          </a:prstGeom>
+          <a:noFill/>
+          <a:ln/>
+        </p:spPr>
+        <p:txBody>
+          <a:bodyPr wrap="square" lIns="0" tIns="0" rIns="0" bIns="0" rtlCol="0" anchor="ctr"/>
+          <a:lstStyle/>
+          <a:p>
+            <a:pPr marL="0" indent="0">
+              <a:buNone/>
+            </a:pPr>
+            <a:r>
+              <a:rPr lang="en-US" sz="2100" b="1" dirty="0" err="1">
+                <a:solidFill>
+                  <a:srgbClr val="1A2B3C"/>
+                </a:solidFill>
+                <a:latin typeface="Trebuchet MS" pitchFamily="34" charset="0"/>
+                <a:ea typeface="Trebuchet MS" pitchFamily="34" charset="-122"/>
+                <a:cs typeface="Trebuchet MS" pitchFamily="34" charset="-120"/>
+              </a:rPr>
+              <a:t>Ejemplo</a:t>
+            </a:r>
+            <a:r>
+              <a:rPr lang="en-US" sz="2100" b="1" dirty="0">
+                <a:solidFill>
+                  <a:srgbClr val="1A2B3C"/>
+                </a:solidFill>
+                <a:latin typeface="Trebuchet MS" pitchFamily="34" charset="0"/>
+                <a:ea typeface="Trebuchet MS" pitchFamily="34" charset="-122"/>
+                <a:cs typeface="Trebuchet MS" pitchFamily="34" charset="-120"/>
+              </a:rPr>
+              <a:t> </a:t>
+            </a:r>
+            <a:r>
+              <a:rPr lang="en-US" sz="2100" b="1" dirty="0" err="1">
+                <a:solidFill>
+                  <a:srgbClr val="1A2B3C"/>
+                </a:solidFill>
+                <a:latin typeface="Trebuchet MS" pitchFamily="34" charset="0"/>
+                <a:ea typeface="Trebuchet MS" pitchFamily="34" charset="-122"/>
+                <a:cs typeface="Trebuchet MS" pitchFamily="34" charset="-120"/>
+              </a:rPr>
+              <a:t>Práctico</a:t>
+            </a:r>
+            <a:endParaRPr lang="en-US" sz="2100" dirty="0"/>
+          </a:p>
+        </p:txBody>
+      </p:sp>
+      <p:sp>
+        <p:nvSpPr>
+          <p:cNvPr id="6" name="Text 4">
+            <a:extLst>
+              <a:ext uri="{FF2B5EF4-FFF2-40B4-BE49-F238E27FC236}">
+                <a16:creationId xmlns:a16="http://schemas.microsoft.com/office/drawing/2014/main" id="{760D2B3F-2634-C95B-DBB2-0CD9ECCC40A1}"/>
+              </a:ext>
+            </a:extLst>
+          </p:cNvPr>
+          <p:cNvSpPr/>
+          <p:nvPr/>
+        </p:nvSpPr>
+        <p:spPr>
+          <a:xfrm>
+            <a:off x="960120" y="676656"/>
+            <a:ext cx="7772400" cy="228600"/>
+          </a:xfrm>
+          <a:prstGeom prst="rect">
+            <a:avLst/>
+          </a:prstGeom>
+          <a:noFill/>
+          <a:ln/>
+        </p:spPr>
+        <p:txBody>
+          <a:bodyPr wrap="square" lIns="0" tIns="0" rIns="0" bIns="0" rtlCol="0" anchor="ctr"/>
+          <a:lstStyle/>
+          <a:p>
+            <a:pPr marL="0" indent="0">
+              <a:buNone/>
+            </a:pPr>
+            <a:r>
+              <a:rPr lang="en-US" sz="950" i="1" dirty="0">
+                <a:solidFill>
+                  <a:srgbClr val="7A92A8"/>
+                </a:solidFill>
+                <a:latin typeface="Calibri" pitchFamily="34" charset="0"/>
+                <a:ea typeface="Calibri" pitchFamily="34" charset="-122"/>
+                <a:cs typeface="Calibri" pitchFamily="34" charset="-120"/>
+              </a:rPr>
+              <a:t>Imagina </a:t>
+            </a:r>
+            <a:r>
+              <a:rPr lang="en-US" sz="950" i="1" dirty="0" err="1">
+                <a:solidFill>
+                  <a:srgbClr val="7A92A8"/>
+                </a:solidFill>
+                <a:latin typeface="Calibri" pitchFamily="34" charset="0"/>
+                <a:ea typeface="Calibri" pitchFamily="34" charset="-122"/>
+                <a:cs typeface="Calibri" pitchFamily="34" charset="-120"/>
+              </a:rPr>
+              <a:t>que</a:t>
+            </a:r>
+            <a:r>
+              <a:rPr lang="en-US" sz="950" i="1" dirty="0">
+                <a:solidFill>
+                  <a:srgbClr val="7A92A8"/>
+                </a:solidFill>
+                <a:latin typeface="Calibri" pitchFamily="34" charset="0"/>
+                <a:ea typeface="Calibri" pitchFamily="34" charset="-122"/>
+                <a:cs typeface="Calibri" pitchFamily="34" charset="-120"/>
+              </a:rPr>
+              <a:t> </a:t>
+            </a:r>
+            <a:r>
+              <a:rPr lang="en-US" sz="950" i="1" dirty="0" err="1">
+                <a:solidFill>
+                  <a:srgbClr val="7A92A8"/>
+                </a:solidFill>
+                <a:latin typeface="Calibri" pitchFamily="34" charset="0"/>
+                <a:ea typeface="Calibri" pitchFamily="34" charset="-122"/>
+                <a:cs typeface="Calibri" pitchFamily="34" charset="-120"/>
+              </a:rPr>
+              <a:t>quieres</a:t>
+            </a:r>
+            <a:r>
+              <a:rPr lang="en-US" sz="950" i="1" dirty="0">
+                <a:solidFill>
+                  <a:srgbClr val="7A92A8"/>
+                </a:solidFill>
+                <a:latin typeface="Calibri" pitchFamily="34" charset="0"/>
+                <a:ea typeface="Calibri" pitchFamily="34" charset="-122"/>
+                <a:cs typeface="Calibri" pitchFamily="34" charset="-120"/>
+              </a:rPr>
+              <a:t> </a:t>
+            </a:r>
+            <a:r>
+              <a:rPr lang="en-US" sz="950" i="1" dirty="0" err="1">
+                <a:solidFill>
+                  <a:srgbClr val="7A92A8"/>
+                </a:solidFill>
+                <a:latin typeface="Calibri" pitchFamily="34" charset="0"/>
+                <a:ea typeface="Calibri" pitchFamily="34" charset="-122"/>
+                <a:cs typeface="Calibri" pitchFamily="34" charset="-120"/>
+              </a:rPr>
+              <a:t>predecir</a:t>
+            </a:r>
+            <a:r>
+              <a:rPr lang="en-US" sz="950" i="1" dirty="0">
+                <a:solidFill>
+                  <a:srgbClr val="7A92A8"/>
+                </a:solidFill>
+                <a:latin typeface="Calibri" pitchFamily="34" charset="0"/>
+                <a:ea typeface="Calibri" pitchFamily="34" charset="-122"/>
+                <a:cs typeface="Calibri" pitchFamily="34" charset="-120"/>
+              </a:rPr>
+              <a:t> </a:t>
+            </a:r>
+            <a:r>
+              <a:rPr lang="en-US" sz="950" i="1" dirty="0" err="1">
+                <a:solidFill>
+                  <a:srgbClr val="7A92A8"/>
+                </a:solidFill>
+                <a:latin typeface="Calibri" pitchFamily="34" charset="0"/>
+                <a:ea typeface="Calibri" pitchFamily="34" charset="-122"/>
+                <a:cs typeface="Calibri" pitchFamily="34" charset="-120"/>
+              </a:rPr>
+              <a:t>el</a:t>
+            </a:r>
+            <a:r>
+              <a:rPr lang="en-US" sz="950" i="1" dirty="0">
+                <a:solidFill>
+                  <a:srgbClr val="7A92A8"/>
+                </a:solidFill>
+                <a:latin typeface="Calibri" pitchFamily="34" charset="0"/>
+                <a:ea typeface="Calibri" pitchFamily="34" charset="-122"/>
+                <a:cs typeface="Calibri" pitchFamily="34" charset="-120"/>
+              </a:rPr>
+              <a:t> </a:t>
+            </a:r>
+            <a:r>
+              <a:rPr lang="en-US" sz="950" i="1" dirty="0" err="1">
+                <a:solidFill>
+                  <a:srgbClr val="7A92A8"/>
+                </a:solidFill>
+                <a:latin typeface="Calibri" pitchFamily="34" charset="0"/>
+                <a:ea typeface="Calibri" pitchFamily="34" charset="-122"/>
+                <a:cs typeface="Calibri" pitchFamily="34" charset="-120"/>
+              </a:rPr>
+              <a:t>precio</a:t>
+            </a:r>
+            <a:r>
+              <a:rPr lang="en-US" sz="950" i="1" dirty="0">
+                <a:solidFill>
+                  <a:srgbClr val="7A92A8"/>
+                </a:solidFill>
+                <a:latin typeface="Calibri" pitchFamily="34" charset="0"/>
+                <a:ea typeface="Calibri" pitchFamily="34" charset="-122"/>
+                <a:cs typeface="Calibri" pitchFamily="34" charset="-120"/>
+              </a:rPr>
+              <a:t> de </a:t>
+            </a:r>
+            <a:r>
+              <a:rPr lang="en-US" sz="950" i="1" dirty="0" err="1">
+                <a:solidFill>
+                  <a:srgbClr val="7A92A8"/>
+                </a:solidFill>
+                <a:latin typeface="Calibri" pitchFamily="34" charset="0"/>
+                <a:ea typeface="Calibri" pitchFamily="34" charset="-122"/>
+                <a:cs typeface="Calibri" pitchFamily="34" charset="-120"/>
+              </a:rPr>
+              <a:t>una</a:t>
+            </a:r>
+            <a:r>
+              <a:rPr lang="en-US" sz="950" i="1" dirty="0">
+                <a:solidFill>
+                  <a:srgbClr val="7A92A8"/>
+                </a:solidFill>
+                <a:latin typeface="Calibri" pitchFamily="34" charset="0"/>
+                <a:ea typeface="Calibri" pitchFamily="34" charset="-122"/>
+                <a:cs typeface="Calibri" pitchFamily="34" charset="-120"/>
+              </a:rPr>
+              <a:t> casa</a:t>
+            </a:r>
+            <a:endParaRPr lang="en-US" sz="950" dirty="0"/>
+          </a:p>
+        </p:txBody>
+      </p:sp>
+      <p:sp>
+        <p:nvSpPr>
+          <p:cNvPr id="7" name="Shape 5">
+            <a:extLst>
+              <a:ext uri="{FF2B5EF4-FFF2-40B4-BE49-F238E27FC236}">
+                <a16:creationId xmlns:a16="http://schemas.microsoft.com/office/drawing/2014/main" id="{F1831201-F031-4EAB-45E6-E173975CE3C4}"/>
+              </a:ext>
+            </a:extLst>
+          </p:cNvPr>
+          <p:cNvSpPr/>
+          <p:nvPr/>
+        </p:nvSpPr>
+        <p:spPr>
+          <a:xfrm>
+            <a:off x="320039" y="1101851"/>
+            <a:ext cx="8385048" cy="3822192"/>
+          </a:xfrm>
+          <a:prstGeom prst="rect">
+            <a:avLst/>
+          </a:prstGeom>
+          <a:solidFill>
+            <a:srgbClr val="FFFFFF"/>
+          </a:solidFill>
+          <a:ln w="6350">
+            <a:solidFill>
+              <a:srgbClr val="DDE8F2"/>
+            </a:solidFill>
+            <a:prstDash val="solid"/>
+          </a:ln>
+          <a:effectLst>
+            <a:outerShdw blurRad="101600" dist="38100" dir="8100000" algn="bl" rotWithShape="0">
+              <a:srgbClr val="9EAFC0">
+                <a:alpha val="13000"/>
+              </a:srgbClr>
+            </a:outerShdw>
+          </a:effectLst>
+        </p:spPr>
+      </p:sp>
+      <p:sp>
+        <p:nvSpPr>
+          <p:cNvPr id="8" name="Shape 6">
+            <a:extLst>
+              <a:ext uri="{FF2B5EF4-FFF2-40B4-BE49-F238E27FC236}">
+                <a16:creationId xmlns:a16="http://schemas.microsoft.com/office/drawing/2014/main" id="{B3C0DDE3-57A9-4497-58BF-897F63B86710}"/>
+              </a:ext>
+            </a:extLst>
+          </p:cNvPr>
+          <p:cNvSpPr/>
+          <p:nvPr/>
+        </p:nvSpPr>
+        <p:spPr>
+          <a:xfrm>
+            <a:off x="320039" y="1078992"/>
+            <a:ext cx="8277775" cy="45719"/>
+          </a:xfrm>
+          <a:prstGeom prst="rect">
+            <a:avLst/>
+          </a:prstGeom>
+          <a:solidFill>
+            <a:srgbClr val="2176AE"/>
+          </a:solidFill>
+          <a:ln w="12700">
+            <a:solidFill>
+              <a:srgbClr val="2176AE"/>
+            </a:solidFill>
+            <a:prstDash val="solid"/>
+          </a:ln>
+        </p:spPr>
+      </p:sp>
+      <p:sp>
+        <p:nvSpPr>
+          <p:cNvPr id="9" name="Text 7">
+            <a:extLst>
+              <a:ext uri="{FF2B5EF4-FFF2-40B4-BE49-F238E27FC236}">
+                <a16:creationId xmlns:a16="http://schemas.microsoft.com/office/drawing/2014/main" id="{BDF13D48-2B33-C280-6A16-F3BB7E8FE65C}"/>
+              </a:ext>
+            </a:extLst>
+          </p:cNvPr>
+          <p:cNvSpPr/>
+          <p:nvPr/>
+        </p:nvSpPr>
+        <p:spPr>
+          <a:xfrm>
+            <a:off x="882396" y="1367059"/>
+            <a:ext cx="3657600" cy="329184"/>
+          </a:xfrm>
+          <a:prstGeom prst="rect">
+            <a:avLst/>
+          </a:prstGeom>
+          <a:noFill/>
+          <a:ln/>
+        </p:spPr>
+        <p:txBody>
+          <a:bodyPr wrap="square" lIns="0" tIns="0" rIns="0" bIns="0" rtlCol="0" anchor="ctr"/>
+          <a:lstStyle/>
+          <a:p>
+            <a:r>
+              <a:rPr lang="en-US" sz="1300" b="1" dirty="0" err="1">
+                <a:solidFill>
+                  <a:srgbClr val="2176AE"/>
+                </a:solidFill>
+                <a:latin typeface="Calibri" pitchFamily="34" charset="0"/>
+                <a:cs typeface="Calibri" pitchFamily="34" charset="-120"/>
+              </a:rPr>
+              <a:t>Explicación</a:t>
+            </a:r>
+            <a:r>
+              <a:rPr lang="en-US" sz="1300" b="1" dirty="0">
+                <a:solidFill>
+                  <a:srgbClr val="2176AE"/>
+                </a:solidFill>
+                <a:latin typeface="Calibri" pitchFamily="34" charset="0"/>
+                <a:cs typeface="Calibri" pitchFamily="34" charset="-120"/>
+              </a:rPr>
+              <a:t> ultra simple del </a:t>
+            </a:r>
+            <a:r>
+              <a:rPr lang="en-US" sz="1300" b="1" dirty="0" err="1">
+                <a:solidFill>
+                  <a:srgbClr val="2176AE"/>
+                </a:solidFill>
+                <a:latin typeface="Calibri" pitchFamily="34" charset="0"/>
+                <a:cs typeface="Calibri" pitchFamily="34" charset="-120"/>
+              </a:rPr>
+              <a:t>flujo</a:t>
+            </a:r>
+            <a:r>
+              <a:rPr lang="en-US" sz="1300" b="1" dirty="0">
+                <a:solidFill>
+                  <a:srgbClr val="2176AE"/>
+                </a:solidFill>
+                <a:latin typeface="Calibri" pitchFamily="34" charset="0"/>
+                <a:cs typeface="Calibri" pitchFamily="34" charset="-120"/>
+              </a:rPr>
+              <a:t> </a:t>
+            </a:r>
+            <a:r>
+              <a:rPr lang="en-US" sz="1300" b="1" dirty="0" err="1">
+                <a:solidFill>
+                  <a:srgbClr val="2176AE"/>
+                </a:solidFill>
+                <a:latin typeface="Calibri" pitchFamily="34" charset="0"/>
+                <a:cs typeface="Calibri" pitchFamily="34" charset="-120"/>
+              </a:rPr>
+              <a:t>completo</a:t>
+            </a:r>
+            <a:endParaRPr lang="en-US" sz="1300" b="1" dirty="0">
+              <a:solidFill>
+                <a:srgbClr val="2176AE"/>
+              </a:solidFill>
+              <a:latin typeface="Calibri" pitchFamily="34" charset="0"/>
+              <a:cs typeface="Calibri" pitchFamily="34" charset="-120"/>
+            </a:endParaRPr>
+          </a:p>
+          <a:p>
+            <a:endParaRPr lang="en-US" sz="1300" b="1" dirty="0">
+              <a:solidFill>
+                <a:srgbClr val="2176AE"/>
+              </a:solidFill>
+              <a:latin typeface="Calibri" pitchFamily="34" charset="0"/>
+              <a:cs typeface="Calibri" pitchFamily="34" charset="-120"/>
+            </a:endParaRPr>
+          </a:p>
+        </p:txBody>
+      </p:sp>
+      <p:sp>
+        <p:nvSpPr>
+          <p:cNvPr id="37" name="Shape 10">
+            <a:extLst>
+              <a:ext uri="{FF2B5EF4-FFF2-40B4-BE49-F238E27FC236}">
+                <a16:creationId xmlns:a16="http://schemas.microsoft.com/office/drawing/2014/main" id="{165E3D24-E7D6-C2AA-686C-459023C572A5}"/>
+              </a:ext>
+            </a:extLst>
+          </p:cNvPr>
+          <p:cNvSpPr/>
+          <p:nvPr/>
+        </p:nvSpPr>
+        <p:spPr>
+          <a:xfrm>
+            <a:off x="2019044" y="1696243"/>
+            <a:ext cx="4678231" cy="3117782"/>
+          </a:xfrm>
+          <a:prstGeom prst="rect">
+            <a:avLst/>
+          </a:prstGeom>
+          <a:solidFill>
+            <a:srgbClr val="EAF2FB"/>
+          </a:solidFill>
+          <a:ln w="6350">
+            <a:solidFill>
+              <a:srgbClr val="C8DEF5"/>
+            </a:solidFill>
+            <a:prstDash val="solid"/>
+          </a:ln>
+        </p:spPr>
+      </p:sp>
+      <p:sp>
+        <p:nvSpPr>
+          <p:cNvPr id="12" name="Text 10">
+            <a:extLst>
+              <a:ext uri="{FF2B5EF4-FFF2-40B4-BE49-F238E27FC236}">
+                <a16:creationId xmlns:a16="http://schemas.microsoft.com/office/drawing/2014/main" id="{7CC5946E-9EAE-A995-2979-554D3E35C859}"/>
+              </a:ext>
+            </a:extLst>
+          </p:cNvPr>
+          <p:cNvSpPr/>
+          <p:nvPr/>
+        </p:nvSpPr>
+        <p:spPr>
+          <a:xfrm>
+            <a:off x="2477318" y="3009848"/>
+            <a:ext cx="4738004" cy="621608"/>
+          </a:xfrm>
+          <a:prstGeom prst="rect">
+            <a:avLst/>
+          </a:prstGeom>
+          <a:noFill/>
+          <a:ln/>
+        </p:spPr>
+        <p:txBody>
+          <a:bodyPr wrap="square" lIns="0" tIns="0" rIns="0" bIns="0" rtlCol="0" anchor="ctr"/>
+          <a:lstStyle/>
+          <a:p>
+            <a:r>
+              <a:rPr lang="en-US" sz="1200" b="1" dirty="0">
+                <a:solidFill>
+                  <a:srgbClr val="0F3D6E"/>
+                </a:solidFill>
+                <a:latin typeface="Calibri" pitchFamily="34" charset="0"/>
+                <a:cs typeface="Calibri" pitchFamily="34" charset="-120"/>
+              </a:rPr>
+              <a:t>Metes variables </a:t>
+            </a:r>
+            <a:r>
+              <a:rPr lang="en-US" sz="1200" b="1" dirty="0" err="1">
+                <a:solidFill>
+                  <a:srgbClr val="0F3D6E"/>
+                </a:solidFill>
+                <a:latin typeface="Calibri" pitchFamily="34" charset="0"/>
+                <a:cs typeface="Calibri" pitchFamily="34" charset="-120"/>
+              </a:rPr>
+              <a:t>como</a:t>
+            </a:r>
+            <a:r>
+              <a:rPr lang="en-US" sz="1200" b="1" dirty="0">
+                <a:solidFill>
+                  <a:srgbClr val="0F3D6E"/>
+                </a:solidFill>
+                <a:latin typeface="Calibri" pitchFamily="34" charset="0"/>
+                <a:cs typeface="Calibri" pitchFamily="34" charset="-120"/>
+              </a:rPr>
+              <a:t>:</a:t>
+            </a:r>
+          </a:p>
+          <a:p>
+            <a:pPr marL="171450" indent="-171450">
+              <a:buFont typeface="Arial" panose="020B0604020202020204" pitchFamily="34" charset="0"/>
+              <a:buChar char="•"/>
+            </a:pPr>
+            <a:r>
+              <a:rPr lang="en-US" sz="1200" dirty="0">
+                <a:solidFill>
+                  <a:srgbClr val="0F3D6E"/>
+                </a:solidFill>
+                <a:latin typeface="Calibri" pitchFamily="34" charset="0"/>
+                <a:cs typeface="Calibri" pitchFamily="34" charset="-120"/>
+              </a:rPr>
+              <a:t>Metros </a:t>
+            </a:r>
+            <a:r>
+              <a:rPr lang="en-US" sz="1200" dirty="0" err="1">
+                <a:solidFill>
+                  <a:srgbClr val="0F3D6E"/>
+                </a:solidFill>
+                <a:latin typeface="Calibri" pitchFamily="34" charset="0"/>
+                <a:cs typeface="Calibri" pitchFamily="34" charset="-120"/>
+              </a:rPr>
+              <a:t>cuadrados</a:t>
+            </a:r>
+            <a:r>
+              <a:rPr lang="en-US" sz="1200" dirty="0">
+                <a:solidFill>
+                  <a:srgbClr val="0F3D6E"/>
+                </a:solidFill>
+                <a:latin typeface="Calibri" pitchFamily="34" charset="0"/>
+                <a:cs typeface="Calibri" pitchFamily="34" charset="-120"/>
+              </a:rPr>
+              <a:t>. </a:t>
+            </a:r>
+          </a:p>
+          <a:p>
+            <a:pPr marL="171450" indent="-171450">
+              <a:buFont typeface="Arial" panose="020B0604020202020204" pitchFamily="34" charset="0"/>
+              <a:buChar char="•"/>
+            </a:pPr>
+            <a:r>
+              <a:rPr lang="en-US" sz="1200" dirty="0" err="1">
+                <a:solidFill>
+                  <a:srgbClr val="0F3D6E"/>
+                </a:solidFill>
+                <a:latin typeface="Calibri" pitchFamily="34" charset="0"/>
+                <a:cs typeface="Calibri" pitchFamily="34" charset="-120"/>
+              </a:rPr>
+              <a:t>Número</a:t>
+            </a:r>
+            <a:r>
+              <a:rPr lang="en-US" sz="1200" dirty="0">
+                <a:solidFill>
+                  <a:srgbClr val="0F3D6E"/>
+                </a:solidFill>
+                <a:latin typeface="Calibri" pitchFamily="34" charset="0"/>
+                <a:cs typeface="Calibri" pitchFamily="34" charset="-120"/>
+              </a:rPr>
+              <a:t> de </a:t>
+            </a:r>
+            <a:r>
+              <a:rPr lang="en-US" sz="1200" dirty="0" err="1">
+                <a:solidFill>
+                  <a:srgbClr val="0F3D6E"/>
+                </a:solidFill>
+                <a:latin typeface="Calibri" pitchFamily="34" charset="0"/>
+                <a:cs typeface="Calibri" pitchFamily="34" charset="-120"/>
+              </a:rPr>
+              <a:t>cuartos</a:t>
+            </a:r>
+            <a:r>
+              <a:rPr lang="en-US" sz="1200" dirty="0">
+                <a:solidFill>
+                  <a:srgbClr val="0F3D6E"/>
+                </a:solidFill>
+                <a:latin typeface="Calibri" pitchFamily="34" charset="0"/>
+                <a:cs typeface="Calibri" pitchFamily="34" charset="-120"/>
+              </a:rPr>
+              <a:t>. </a:t>
+            </a:r>
+          </a:p>
+          <a:p>
+            <a:pPr marL="171450" indent="-171450">
+              <a:buFont typeface="Arial" panose="020B0604020202020204" pitchFamily="34" charset="0"/>
+              <a:buChar char="•"/>
+            </a:pPr>
+            <a:r>
+              <a:rPr lang="en-US" sz="1200" dirty="0" err="1">
+                <a:solidFill>
+                  <a:srgbClr val="0F3D6E"/>
+                </a:solidFill>
+                <a:latin typeface="Calibri" pitchFamily="34" charset="0"/>
+                <a:cs typeface="Calibri" pitchFamily="34" charset="-120"/>
+              </a:rPr>
+              <a:t>Ubicación</a:t>
+            </a:r>
+            <a:r>
+              <a:rPr lang="en-US" sz="1200" dirty="0">
+                <a:solidFill>
+                  <a:srgbClr val="0F3D6E"/>
+                </a:solidFill>
+                <a:latin typeface="Calibri" pitchFamily="34" charset="0"/>
+                <a:cs typeface="Calibri" pitchFamily="34" charset="-120"/>
+              </a:rPr>
+              <a:t>. </a:t>
+            </a:r>
+          </a:p>
+          <a:p>
+            <a:pPr marL="171450" indent="-171450">
+              <a:buFont typeface="Arial" panose="020B0604020202020204" pitchFamily="34" charset="0"/>
+              <a:buChar char="•"/>
+            </a:pPr>
+            <a:r>
+              <a:rPr lang="en-US" sz="1200" dirty="0" err="1">
+                <a:solidFill>
+                  <a:srgbClr val="0F3D6E"/>
+                </a:solidFill>
+                <a:latin typeface="Calibri" pitchFamily="34" charset="0"/>
+                <a:cs typeface="Calibri" pitchFamily="34" charset="-120"/>
+              </a:rPr>
+              <a:t>Antigüedad</a:t>
+            </a:r>
+            <a:r>
+              <a:rPr lang="en-US" sz="1200" dirty="0">
+                <a:solidFill>
+                  <a:srgbClr val="0F3D6E"/>
+                </a:solidFill>
+                <a:latin typeface="Calibri" pitchFamily="34" charset="0"/>
+                <a:cs typeface="Calibri" pitchFamily="34" charset="-120"/>
+              </a:rPr>
+              <a:t>. </a:t>
+            </a:r>
+          </a:p>
+          <a:p>
+            <a:pPr marL="171450" indent="-171450">
+              <a:buFont typeface="Arial" panose="020B0604020202020204" pitchFamily="34" charset="0"/>
+              <a:buChar char="•"/>
+            </a:pPr>
+            <a:endParaRPr lang="en-US" sz="1200" dirty="0">
+              <a:solidFill>
+                <a:srgbClr val="0F3D6E"/>
+              </a:solidFill>
+              <a:latin typeface="Calibri" pitchFamily="34" charset="0"/>
+              <a:cs typeface="Calibri" pitchFamily="34" charset="-120"/>
+            </a:endParaRPr>
+          </a:p>
+          <a:p>
+            <a:r>
+              <a:rPr lang="en-US" sz="1200" b="1" dirty="0" err="1">
+                <a:solidFill>
+                  <a:srgbClr val="0F3D6E"/>
+                </a:solidFill>
+                <a:latin typeface="Calibri" pitchFamily="34" charset="0"/>
+                <a:cs typeface="Calibri" pitchFamily="34" charset="-120"/>
+              </a:rPr>
+              <a:t>Entonces</a:t>
+            </a:r>
+            <a:r>
+              <a:rPr lang="en-US" sz="1200" b="1" dirty="0">
+                <a:solidFill>
+                  <a:srgbClr val="0F3D6E"/>
+                </a:solidFill>
+                <a:latin typeface="Calibri" pitchFamily="34" charset="0"/>
+                <a:cs typeface="Calibri" pitchFamily="34" charset="-120"/>
+              </a:rPr>
+              <a:t> </a:t>
+            </a:r>
+            <a:r>
+              <a:rPr lang="en-US" sz="1200" b="1" dirty="0" err="1">
+                <a:solidFill>
+                  <a:srgbClr val="0F3D6E"/>
+                </a:solidFill>
+                <a:latin typeface="Calibri" pitchFamily="34" charset="0"/>
+                <a:cs typeface="Calibri" pitchFamily="34" charset="-120"/>
+              </a:rPr>
+              <a:t>preguntas</a:t>
+            </a:r>
+            <a:r>
+              <a:rPr lang="en-US" sz="1200" b="1" dirty="0">
+                <a:solidFill>
+                  <a:srgbClr val="0F3D6E"/>
+                </a:solidFill>
+                <a:latin typeface="Calibri" pitchFamily="34" charset="0"/>
+                <a:cs typeface="Calibri" pitchFamily="34" charset="-120"/>
+              </a:rPr>
+              <a:t>:</a:t>
+            </a:r>
+          </a:p>
+          <a:p>
+            <a:pPr lvl="1"/>
+            <a:r>
+              <a:rPr lang="en-US" sz="1200" b="1" dirty="0">
+                <a:solidFill>
+                  <a:srgbClr val="0F3D6E"/>
+                </a:solidFill>
+                <a:latin typeface="Calibri" pitchFamily="34" charset="0"/>
+                <a:cs typeface="Calibri" pitchFamily="34" charset="-120"/>
+              </a:rPr>
+              <a:t>1. ¿</a:t>
+            </a:r>
+            <a:r>
+              <a:rPr lang="en-US" sz="1200" b="1" dirty="0" err="1">
+                <a:solidFill>
+                  <a:srgbClr val="0F3D6E"/>
+                </a:solidFill>
+                <a:latin typeface="Calibri" pitchFamily="34" charset="0"/>
+                <a:cs typeface="Calibri" pitchFamily="34" charset="-120"/>
+              </a:rPr>
+              <a:t>Qué</a:t>
+            </a:r>
+            <a:r>
+              <a:rPr lang="en-US" sz="1200" b="1" dirty="0">
+                <a:solidFill>
+                  <a:srgbClr val="0F3D6E"/>
+                </a:solidFill>
+                <a:latin typeface="Calibri" pitchFamily="34" charset="0"/>
+                <a:cs typeface="Calibri" pitchFamily="34" charset="-120"/>
+              </a:rPr>
+              <a:t> tanto </a:t>
+            </a:r>
+            <a:r>
+              <a:rPr lang="en-US" sz="1200" b="1" dirty="0" err="1">
+                <a:solidFill>
+                  <a:srgbClr val="0F3D6E"/>
+                </a:solidFill>
+                <a:latin typeface="Calibri" pitchFamily="34" charset="0"/>
+                <a:cs typeface="Calibri" pitchFamily="34" charset="-120"/>
+              </a:rPr>
+              <a:t>explica</a:t>
+            </a:r>
+            <a:r>
+              <a:rPr lang="en-US" sz="1200" b="1" dirty="0">
+                <a:solidFill>
+                  <a:srgbClr val="0F3D6E"/>
+                </a:solidFill>
+                <a:latin typeface="Calibri" pitchFamily="34" charset="0"/>
+                <a:cs typeface="Calibri" pitchFamily="34" charset="-120"/>
+              </a:rPr>
+              <a:t> mi </a:t>
+            </a:r>
+            <a:r>
+              <a:rPr lang="en-US" sz="1200" b="1" dirty="0" err="1">
+                <a:solidFill>
+                  <a:srgbClr val="0F3D6E"/>
+                </a:solidFill>
+                <a:latin typeface="Calibri" pitchFamily="34" charset="0"/>
+                <a:cs typeface="Calibri" pitchFamily="34" charset="-120"/>
+              </a:rPr>
+              <a:t>modelo</a:t>
+            </a:r>
+            <a:r>
+              <a:rPr lang="en-US" sz="1200" b="1" dirty="0">
+                <a:solidFill>
+                  <a:srgbClr val="0F3D6E"/>
+                </a:solidFill>
+                <a:latin typeface="Calibri" pitchFamily="34" charset="0"/>
+                <a:cs typeface="Calibri" pitchFamily="34" charset="-120"/>
+              </a:rPr>
+              <a:t>?</a:t>
+            </a:r>
+          </a:p>
+          <a:p>
+            <a:pPr lvl="2"/>
+            <a:r>
+              <a:rPr lang="en-US" sz="1200" dirty="0">
+                <a:solidFill>
+                  <a:srgbClr val="0F3D6E"/>
+                </a:solidFill>
+                <a:latin typeface="Calibri" pitchFamily="34" charset="0"/>
+                <a:cs typeface="Calibri" pitchFamily="34" charset="-120"/>
+              </a:rPr>
+              <a:t>Eso es R²</a:t>
+            </a:r>
+          </a:p>
+          <a:p>
+            <a:pPr lvl="1"/>
+            <a:r>
+              <a:rPr lang="en-US" sz="1200" b="1" dirty="0">
+                <a:solidFill>
+                  <a:srgbClr val="0F3D6E"/>
+                </a:solidFill>
+                <a:latin typeface="Calibri" pitchFamily="34" charset="0"/>
+                <a:cs typeface="Calibri" pitchFamily="34" charset="-120"/>
+              </a:rPr>
+              <a:t>2. ¿</a:t>
+            </a:r>
+            <a:r>
+              <a:rPr lang="en-US" sz="1200" b="1" dirty="0" err="1">
+                <a:solidFill>
+                  <a:srgbClr val="0F3D6E"/>
+                </a:solidFill>
+                <a:latin typeface="Calibri" pitchFamily="34" charset="0"/>
+                <a:cs typeface="Calibri" pitchFamily="34" charset="-120"/>
+              </a:rPr>
+              <a:t>Estoy</a:t>
+            </a:r>
+            <a:r>
+              <a:rPr lang="en-US" sz="1200" b="1" dirty="0">
+                <a:solidFill>
+                  <a:srgbClr val="0F3D6E"/>
+                </a:solidFill>
+                <a:latin typeface="Calibri" pitchFamily="34" charset="0"/>
+                <a:cs typeface="Calibri" pitchFamily="34" charset="-120"/>
+              </a:rPr>
+              <a:t> </a:t>
+            </a:r>
+            <a:r>
+              <a:rPr lang="en-US" sz="1200" b="1" dirty="0" err="1">
+                <a:solidFill>
+                  <a:srgbClr val="0F3D6E"/>
+                </a:solidFill>
+                <a:latin typeface="Calibri" pitchFamily="34" charset="0"/>
+                <a:cs typeface="Calibri" pitchFamily="34" charset="-120"/>
+              </a:rPr>
+              <a:t>metiendo</a:t>
+            </a:r>
+            <a:r>
+              <a:rPr lang="en-US" sz="1200" b="1" dirty="0">
+                <a:solidFill>
+                  <a:srgbClr val="0F3D6E"/>
+                </a:solidFill>
+                <a:latin typeface="Calibri" pitchFamily="34" charset="0"/>
+                <a:cs typeface="Calibri" pitchFamily="34" charset="-120"/>
+              </a:rPr>
+              <a:t> variables </a:t>
+            </a:r>
+            <a:r>
+              <a:rPr lang="en-US" sz="1200" b="1" dirty="0" err="1">
+                <a:solidFill>
+                  <a:srgbClr val="0F3D6E"/>
+                </a:solidFill>
+                <a:latin typeface="Calibri" pitchFamily="34" charset="0"/>
+                <a:cs typeface="Calibri" pitchFamily="34" charset="-120"/>
+              </a:rPr>
+              <a:t>inútiles</a:t>
+            </a:r>
+            <a:r>
+              <a:rPr lang="en-US" sz="1200" b="1" dirty="0">
+                <a:solidFill>
+                  <a:srgbClr val="0F3D6E"/>
+                </a:solidFill>
+                <a:latin typeface="Calibri" pitchFamily="34" charset="0"/>
+                <a:cs typeface="Calibri" pitchFamily="34" charset="-120"/>
+              </a:rPr>
+              <a:t>?</a:t>
+            </a:r>
+          </a:p>
+          <a:p>
+            <a:pPr lvl="2"/>
+            <a:r>
+              <a:rPr lang="en-US" sz="1200" dirty="0">
+                <a:solidFill>
+                  <a:srgbClr val="0F3D6E"/>
+                </a:solidFill>
+                <a:latin typeface="Calibri" pitchFamily="34" charset="0"/>
+                <a:cs typeface="Calibri" pitchFamily="34" charset="-120"/>
+              </a:rPr>
+              <a:t>Eso es R² </a:t>
+            </a:r>
+            <a:r>
+              <a:rPr lang="en-US" sz="1200" dirty="0" err="1">
+                <a:solidFill>
+                  <a:srgbClr val="0F3D6E"/>
+                </a:solidFill>
+                <a:latin typeface="Calibri" pitchFamily="34" charset="0"/>
+                <a:cs typeface="Calibri" pitchFamily="34" charset="-120"/>
+              </a:rPr>
+              <a:t>ajustado</a:t>
+            </a:r>
+            <a:endParaRPr lang="en-US" sz="1200" dirty="0">
+              <a:solidFill>
+                <a:srgbClr val="0F3D6E"/>
+              </a:solidFill>
+              <a:latin typeface="Calibri" pitchFamily="34" charset="0"/>
+              <a:cs typeface="Calibri" pitchFamily="34" charset="-120"/>
+            </a:endParaRPr>
+          </a:p>
+          <a:p>
+            <a:pPr lvl="1"/>
+            <a:r>
+              <a:rPr lang="en-US" sz="1200" b="1" dirty="0">
+                <a:solidFill>
+                  <a:srgbClr val="0F3D6E"/>
+                </a:solidFill>
+                <a:latin typeface="Calibri" pitchFamily="34" charset="0"/>
+                <a:cs typeface="Calibri" pitchFamily="34" charset="-120"/>
+              </a:rPr>
+              <a:t>3. ¿El </a:t>
+            </a:r>
+            <a:r>
+              <a:rPr lang="en-US" sz="1200" b="1" dirty="0" err="1">
+                <a:solidFill>
+                  <a:srgbClr val="0F3D6E"/>
+                </a:solidFill>
+                <a:latin typeface="Calibri" pitchFamily="34" charset="0"/>
+                <a:cs typeface="Calibri" pitchFamily="34" charset="-120"/>
+              </a:rPr>
+              <a:t>modelo</a:t>
+            </a:r>
+            <a:r>
+              <a:rPr lang="en-US" sz="1200" b="1" dirty="0">
+                <a:solidFill>
+                  <a:srgbClr val="0F3D6E"/>
+                </a:solidFill>
+                <a:latin typeface="Calibri" pitchFamily="34" charset="0"/>
+                <a:cs typeface="Calibri" pitchFamily="34" charset="-120"/>
+              </a:rPr>
+              <a:t> </a:t>
+            </a:r>
+            <a:r>
+              <a:rPr lang="en-US" sz="1200" b="1" dirty="0" err="1">
+                <a:solidFill>
+                  <a:srgbClr val="0F3D6E"/>
+                </a:solidFill>
+                <a:latin typeface="Calibri" pitchFamily="34" charset="0"/>
+                <a:cs typeface="Calibri" pitchFamily="34" charset="-120"/>
+              </a:rPr>
+              <a:t>completo</a:t>
+            </a:r>
+            <a:r>
+              <a:rPr lang="en-US" sz="1200" b="1" dirty="0">
+                <a:solidFill>
+                  <a:srgbClr val="0F3D6E"/>
+                </a:solidFill>
+                <a:latin typeface="Calibri" pitchFamily="34" charset="0"/>
+                <a:cs typeface="Calibri" pitchFamily="34" charset="-120"/>
+              </a:rPr>
+              <a:t> </a:t>
+            </a:r>
+            <a:r>
+              <a:rPr lang="en-US" sz="1200" b="1" dirty="0" err="1">
+                <a:solidFill>
+                  <a:srgbClr val="0F3D6E"/>
+                </a:solidFill>
+                <a:latin typeface="Calibri" pitchFamily="34" charset="0"/>
+                <a:cs typeface="Calibri" pitchFamily="34" charset="-120"/>
+              </a:rPr>
+              <a:t>realmente</a:t>
+            </a:r>
+            <a:r>
+              <a:rPr lang="en-US" sz="1200" b="1" dirty="0">
+                <a:solidFill>
+                  <a:srgbClr val="0F3D6E"/>
+                </a:solidFill>
+                <a:latin typeface="Calibri" pitchFamily="34" charset="0"/>
+                <a:cs typeface="Calibri" pitchFamily="34" charset="-120"/>
+              </a:rPr>
+              <a:t> </a:t>
+            </a:r>
+            <a:r>
+              <a:rPr lang="en-US" sz="1200" b="1" dirty="0" err="1">
+                <a:solidFill>
+                  <a:srgbClr val="0F3D6E"/>
+                </a:solidFill>
+                <a:latin typeface="Calibri" pitchFamily="34" charset="0"/>
+                <a:cs typeface="Calibri" pitchFamily="34" charset="-120"/>
+              </a:rPr>
+              <a:t>sirve</a:t>
+            </a:r>
+            <a:r>
+              <a:rPr lang="en-US" sz="1200" b="1" dirty="0">
+                <a:solidFill>
+                  <a:srgbClr val="0F3D6E"/>
+                </a:solidFill>
+                <a:latin typeface="Calibri" pitchFamily="34" charset="0"/>
+                <a:cs typeface="Calibri" pitchFamily="34" charset="-120"/>
+              </a:rPr>
+              <a:t>?</a:t>
+            </a:r>
+          </a:p>
+          <a:p>
+            <a:pPr lvl="2"/>
+            <a:r>
+              <a:rPr lang="en-US" sz="1200" dirty="0">
+                <a:solidFill>
+                  <a:srgbClr val="0F3D6E"/>
+                </a:solidFill>
+                <a:latin typeface="Calibri" pitchFamily="34" charset="0"/>
+                <a:cs typeface="Calibri" pitchFamily="34" charset="-120"/>
+              </a:rPr>
+              <a:t>Eso es </a:t>
+            </a:r>
+            <a:r>
+              <a:rPr lang="en-US" sz="1200" dirty="0" err="1">
+                <a:solidFill>
+                  <a:srgbClr val="0F3D6E"/>
+                </a:solidFill>
+                <a:latin typeface="Calibri" pitchFamily="34" charset="0"/>
+                <a:cs typeface="Calibri" pitchFamily="34" charset="-120"/>
+              </a:rPr>
+              <a:t>el</a:t>
+            </a:r>
+            <a:r>
+              <a:rPr lang="en-US" sz="1200" dirty="0">
+                <a:solidFill>
+                  <a:srgbClr val="0F3D6E"/>
+                </a:solidFill>
+                <a:latin typeface="Calibri" pitchFamily="34" charset="0"/>
+                <a:cs typeface="Calibri" pitchFamily="34" charset="-120"/>
+              </a:rPr>
+              <a:t> F-test global</a:t>
+            </a:r>
+          </a:p>
+          <a:p>
+            <a:pPr lvl="1"/>
+            <a:r>
+              <a:rPr lang="en-US" sz="1200" b="1" dirty="0">
+                <a:solidFill>
+                  <a:srgbClr val="0F3D6E"/>
+                </a:solidFill>
+                <a:latin typeface="Calibri" pitchFamily="34" charset="0"/>
+                <a:cs typeface="Calibri" pitchFamily="34" charset="-120"/>
+              </a:rPr>
+              <a:t>4. ¿</a:t>
+            </a:r>
+            <a:r>
+              <a:rPr lang="en-US" sz="1200" b="1" dirty="0" err="1">
+                <a:solidFill>
+                  <a:srgbClr val="0F3D6E"/>
+                </a:solidFill>
+                <a:latin typeface="Calibri" pitchFamily="34" charset="0"/>
+                <a:cs typeface="Calibri" pitchFamily="34" charset="-120"/>
+              </a:rPr>
+              <a:t>Cuál</a:t>
+            </a:r>
+            <a:r>
+              <a:rPr lang="en-US" sz="1200" b="1" dirty="0">
+                <a:solidFill>
+                  <a:srgbClr val="0F3D6E"/>
+                </a:solidFill>
+                <a:latin typeface="Calibri" pitchFamily="34" charset="0"/>
+                <a:cs typeface="Calibri" pitchFamily="34" charset="-120"/>
+              </a:rPr>
+              <a:t> variable individual </a:t>
+            </a:r>
+            <a:r>
+              <a:rPr lang="en-US" sz="1200" b="1" dirty="0" err="1">
+                <a:solidFill>
+                  <a:srgbClr val="0F3D6E"/>
+                </a:solidFill>
+                <a:latin typeface="Calibri" pitchFamily="34" charset="0"/>
+                <a:cs typeface="Calibri" pitchFamily="34" charset="-120"/>
+              </a:rPr>
+              <a:t>sí</a:t>
+            </a:r>
+            <a:r>
+              <a:rPr lang="en-US" sz="1200" b="1" dirty="0">
+                <a:solidFill>
+                  <a:srgbClr val="0F3D6E"/>
+                </a:solidFill>
+                <a:latin typeface="Calibri" pitchFamily="34" charset="0"/>
+                <a:cs typeface="Calibri" pitchFamily="34" charset="-120"/>
+              </a:rPr>
+              <a:t> </a:t>
+            </a:r>
+            <a:r>
+              <a:rPr lang="en-US" sz="1200" b="1" dirty="0" err="1">
+                <a:solidFill>
+                  <a:srgbClr val="0F3D6E"/>
+                </a:solidFill>
+                <a:latin typeface="Calibri" pitchFamily="34" charset="0"/>
+                <a:cs typeface="Calibri" pitchFamily="34" charset="-120"/>
+              </a:rPr>
+              <a:t>aporta</a:t>
+            </a:r>
+            <a:r>
+              <a:rPr lang="en-US" sz="1200" b="1" dirty="0">
+                <a:solidFill>
+                  <a:srgbClr val="0F3D6E"/>
+                </a:solidFill>
+                <a:latin typeface="Calibri" pitchFamily="34" charset="0"/>
+                <a:cs typeface="Calibri" pitchFamily="34" charset="-120"/>
+              </a:rPr>
+              <a:t>?</a:t>
+            </a:r>
+          </a:p>
+          <a:p>
+            <a:pPr lvl="2"/>
+            <a:r>
+              <a:rPr lang="en-US" sz="1200" dirty="0">
+                <a:solidFill>
+                  <a:srgbClr val="0F3D6E"/>
+                </a:solidFill>
+                <a:latin typeface="Calibri" pitchFamily="34" charset="0"/>
+                <a:cs typeface="Calibri" pitchFamily="34" charset="-120"/>
+              </a:rPr>
+              <a:t>Eso es </a:t>
+            </a:r>
+            <a:r>
+              <a:rPr lang="en-US" sz="1200" dirty="0" err="1">
+                <a:solidFill>
+                  <a:srgbClr val="0F3D6E"/>
+                </a:solidFill>
+                <a:latin typeface="Calibri" pitchFamily="34" charset="0"/>
+                <a:cs typeface="Calibri" pitchFamily="34" charset="-120"/>
+              </a:rPr>
+              <a:t>el</a:t>
+            </a:r>
+            <a:r>
+              <a:rPr lang="en-US" sz="1200" dirty="0">
+                <a:solidFill>
+                  <a:srgbClr val="0F3D6E"/>
+                </a:solidFill>
+                <a:latin typeface="Calibri" pitchFamily="34" charset="0"/>
+                <a:cs typeface="Calibri" pitchFamily="34" charset="-120"/>
+              </a:rPr>
+              <a:t> t-test</a:t>
+            </a:r>
+          </a:p>
+          <a:p>
+            <a:pPr lvl="1"/>
+            <a:r>
+              <a:rPr lang="en-US" sz="1200" b="1" dirty="0">
+                <a:solidFill>
+                  <a:srgbClr val="0F3D6E"/>
+                </a:solidFill>
+                <a:latin typeface="Calibri" pitchFamily="34" charset="0"/>
+                <a:cs typeface="Calibri" pitchFamily="34" charset="-120"/>
+              </a:rPr>
+              <a:t>5. ¿En </a:t>
+            </a:r>
+            <a:r>
+              <a:rPr lang="en-US" sz="1200" b="1" dirty="0" err="1">
+                <a:solidFill>
+                  <a:srgbClr val="0F3D6E"/>
+                </a:solidFill>
+                <a:latin typeface="Calibri" pitchFamily="34" charset="0"/>
+                <a:cs typeface="Calibri" pitchFamily="34" charset="-120"/>
+              </a:rPr>
+              <a:t>qué</a:t>
+            </a:r>
+            <a:r>
+              <a:rPr lang="en-US" sz="1200" b="1" dirty="0">
+                <a:solidFill>
+                  <a:srgbClr val="0F3D6E"/>
+                </a:solidFill>
+                <a:latin typeface="Calibri" pitchFamily="34" charset="0"/>
+                <a:cs typeface="Calibri" pitchFamily="34" charset="-120"/>
+              </a:rPr>
+              <a:t> </a:t>
+            </a:r>
+            <a:r>
+              <a:rPr lang="en-US" sz="1200" b="1" dirty="0" err="1">
+                <a:solidFill>
+                  <a:srgbClr val="0F3D6E"/>
+                </a:solidFill>
+                <a:latin typeface="Calibri" pitchFamily="34" charset="0"/>
+                <a:cs typeface="Calibri" pitchFamily="34" charset="-120"/>
+              </a:rPr>
+              <a:t>rango</a:t>
+            </a:r>
+            <a:r>
+              <a:rPr lang="en-US" sz="1200" b="1" dirty="0">
+                <a:solidFill>
+                  <a:srgbClr val="0F3D6E"/>
+                </a:solidFill>
+                <a:latin typeface="Calibri" pitchFamily="34" charset="0"/>
+                <a:cs typeface="Calibri" pitchFamily="34" charset="-120"/>
+              </a:rPr>
+              <a:t> </a:t>
+            </a:r>
+            <a:r>
+              <a:rPr lang="en-US" sz="1200" b="1" dirty="0" err="1">
+                <a:solidFill>
+                  <a:srgbClr val="0F3D6E"/>
+                </a:solidFill>
+                <a:latin typeface="Calibri" pitchFamily="34" charset="0"/>
+                <a:cs typeface="Calibri" pitchFamily="34" charset="-120"/>
+              </a:rPr>
+              <a:t>podría</a:t>
+            </a:r>
+            <a:r>
+              <a:rPr lang="en-US" sz="1200" b="1" dirty="0">
+                <a:solidFill>
+                  <a:srgbClr val="0F3D6E"/>
+                </a:solidFill>
+                <a:latin typeface="Calibri" pitchFamily="34" charset="0"/>
+                <a:cs typeface="Calibri" pitchFamily="34" charset="-120"/>
+              </a:rPr>
+              <a:t> </a:t>
+            </a:r>
+            <a:r>
+              <a:rPr lang="en-US" sz="1200" b="1" dirty="0" err="1">
+                <a:solidFill>
+                  <a:srgbClr val="0F3D6E"/>
+                </a:solidFill>
+                <a:latin typeface="Calibri" pitchFamily="34" charset="0"/>
+                <a:cs typeface="Calibri" pitchFamily="34" charset="-120"/>
+              </a:rPr>
+              <a:t>estar</a:t>
+            </a:r>
+            <a:r>
+              <a:rPr lang="en-US" sz="1200" b="1" dirty="0">
+                <a:solidFill>
+                  <a:srgbClr val="0F3D6E"/>
+                </a:solidFill>
+                <a:latin typeface="Calibri" pitchFamily="34" charset="0"/>
+                <a:cs typeface="Calibri" pitchFamily="34" charset="-120"/>
+              </a:rPr>
+              <a:t> </a:t>
+            </a:r>
+            <a:r>
+              <a:rPr lang="en-US" sz="1200" b="1" dirty="0" err="1">
+                <a:solidFill>
+                  <a:srgbClr val="0F3D6E"/>
+                </a:solidFill>
+                <a:latin typeface="Calibri" pitchFamily="34" charset="0"/>
+                <a:cs typeface="Calibri" pitchFamily="34" charset="-120"/>
+              </a:rPr>
+              <a:t>el</a:t>
+            </a:r>
+            <a:r>
+              <a:rPr lang="en-US" sz="1200" b="1" dirty="0">
+                <a:solidFill>
+                  <a:srgbClr val="0F3D6E"/>
+                </a:solidFill>
+                <a:latin typeface="Calibri" pitchFamily="34" charset="0"/>
+                <a:cs typeface="Calibri" pitchFamily="34" charset="-120"/>
+              </a:rPr>
+              <a:t> </a:t>
+            </a:r>
+            <a:r>
+              <a:rPr lang="en-US" sz="1200" b="1" dirty="0" err="1">
+                <a:solidFill>
+                  <a:srgbClr val="0F3D6E"/>
+                </a:solidFill>
+                <a:latin typeface="Calibri" pitchFamily="34" charset="0"/>
+                <a:cs typeface="Calibri" pitchFamily="34" charset="-120"/>
+              </a:rPr>
+              <a:t>verdadero</a:t>
+            </a:r>
+            <a:r>
+              <a:rPr lang="en-US" sz="1200" b="1" dirty="0">
+                <a:solidFill>
+                  <a:srgbClr val="0F3D6E"/>
+                </a:solidFill>
+                <a:latin typeface="Calibri" pitchFamily="34" charset="0"/>
+                <a:cs typeface="Calibri" pitchFamily="34" charset="-120"/>
+              </a:rPr>
+              <a:t> </a:t>
+            </a:r>
+            <a:r>
+              <a:rPr lang="en-US" sz="1200" b="1" dirty="0" err="1">
+                <a:solidFill>
+                  <a:srgbClr val="0F3D6E"/>
+                </a:solidFill>
+                <a:latin typeface="Calibri" pitchFamily="34" charset="0"/>
+                <a:cs typeface="Calibri" pitchFamily="34" charset="-120"/>
+              </a:rPr>
+              <a:t>efecto</a:t>
+            </a:r>
+            <a:r>
+              <a:rPr lang="en-US" sz="1200" b="1" dirty="0">
+                <a:solidFill>
+                  <a:srgbClr val="0F3D6E"/>
+                </a:solidFill>
+                <a:latin typeface="Calibri" pitchFamily="34" charset="0"/>
+                <a:cs typeface="Calibri" pitchFamily="34" charset="-120"/>
+              </a:rPr>
+              <a:t>?</a:t>
+            </a:r>
+          </a:p>
+          <a:p>
+            <a:pPr lvl="2"/>
+            <a:r>
+              <a:rPr lang="en-US" sz="1200" dirty="0">
+                <a:solidFill>
+                  <a:srgbClr val="0F3D6E"/>
+                </a:solidFill>
+                <a:latin typeface="Calibri" pitchFamily="34" charset="0"/>
+                <a:cs typeface="Calibri" pitchFamily="34" charset="-120"/>
+              </a:rPr>
+              <a:t>Eso es </a:t>
+            </a:r>
+            <a:r>
+              <a:rPr lang="en-US" sz="1200" dirty="0" err="1">
+                <a:solidFill>
+                  <a:srgbClr val="0F3D6E"/>
+                </a:solidFill>
+                <a:latin typeface="Calibri" pitchFamily="34" charset="0"/>
+                <a:cs typeface="Calibri" pitchFamily="34" charset="-120"/>
+              </a:rPr>
+              <a:t>el</a:t>
+            </a:r>
+            <a:r>
+              <a:rPr lang="en-US" sz="1200" dirty="0">
+                <a:solidFill>
+                  <a:srgbClr val="0F3D6E"/>
+                </a:solidFill>
+                <a:latin typeface="Calibri" pitchFamily="34" charset="0"/>
+                <a:cs typeface="Calibri" pitchFamily="34" charset="-120"/>
+              </a:rPr>
+              <a:t> </a:t>
+            </a:r>
+            <a:r>
+              <a:rPr lang="en-US" sz="1200" dirty="0" err="1">
+                <a:solidFill>
+                  <a:srgbClr val="0F3D6E"/>
+                </a:solidFill>
+                <a:latin typeface="Calibri" pitchFamily="34" charset="0"/>
+                <a:cs typeface="Calibri" pitchFamily="34" charset="-120"/>
+              </a:rPr>
+              <a:t>intervalo</a:t>
+            </a:r>
+            <a:r>
+              <a:rPr lang="en-US" sz="1200" dirty="0">
+                <a:solidFill>
+                  <a:srgbClr val="0F3D6E"/>
+                </a:solidFill>
+                <a:latin typeface="Calibri" pitchFamily="34" charset="0"/>
+                <a:cs typeface="Calibri" pitchFamily="34" charset="-120"/>
+              </a:rPr>
+              <a:t> de confianza</a:t>
+            </a:r>
+          </a:p>
+          <a:p>
+            <a:pPr marL="0" indent="0">
+              <a:buNone/>
+            </a:pPr>
+            <a:endParaRPr lang="en-US" sz="1000" dirty="0"/>
+          </a:p>
+        </p:txBody>
+      </p:sp>
+    </p:spTree>
+    <p:extLst>
+      <p:ext uri="{BB962C8B-B14F-4D97-AF65-F5344CB8AC3E}">
+        <p14:creationId xmlns:p14="http://schemas.microsoft.com/office/powerpoint/2010/main" val="2789365104"/>
+      </p:ext>
+    </p:extLst>
+  </p:cSld>
+  <p:clrMapOvr>
+    <a:masterClrMapping/>
+  </p:clrMapOvr>
+</p:sld>
+</file>
+
+<file path=ppt/slides/slide9.xml><?xml version="1.0" encoding="utf-8"?>
+<p:sld xmlns:a="http://schemas.openxmlformats.org/drawingml/2006/main" xmlns:r="http://schemas.openxmlformats.org/officeDocument/2006/relationships" xmlns:p="http://schemas.openxmlformats.org/presentationml/2006/main">
   <p:cSld name="Slide 8">
     <p:bg>
       <p:bgPr>
@@ -13465,1013 +16216,6 @@
               <a:t>        print(f'{nm:14s} β̂={beta[i]:+.4f}  SE={SE[i]:.4f}  t={t[i]:.3f}  {sig}')</a:t>
             </a:r>
             <a:endParaRPr lang="en-US" sz="950" dirty="0"/>
-          </a:p>
-        </p:txBody>
-      </p:sp>
-    </p:spTree>
-  </p:cSld>
-  <p:clrMapOvr>
-    <a:masterClrMapping/>
-  </p:clrMapOvr>
-</p:sld>
-</file>
-
-<file path=ppt/slides/slide9.xml><?xml version="1.0" encoding="utf-8"?>
-<p:sld xmlns:a="http://schemas.openxmlformats.org/drawingml/2006/main" xmlns:r="http://schemas.openxmlformats.org/officeDocument/2006/relationships" xmlns:p="http://schemas.openxmlformats.org/presentationml/2006/main">
-  <p:cSld name="Slide 9">
-    <p:bg>
-      <p:bgPr>
-        <a:solidFill>
-          <a:srgbClr val="FFFFFF"/>
-        </a:solidFill>
-        <a:effectLst/>
-      </p:bgPr>
-    </p:bg>
-    <p:spTree>
-      <p:nvGrpSpPr>
-        <p:cNvPr id="1" name=""/>
-        <p:cNvGrpSpPr/>
-        <p:nvPr/>
-      </p:nvGrpSpPr>
-      <p:grpSpPr>
-        <a:xfrm>
-          <a:off x="0" y="0"/>
-          <a:ext cx="0" cy="0"/>
-          <a:chOff x="0" y="0"/>
-          <a:chExt cx="0" cy="0"/>
-        </a:xfrm>
-      </p:grpSpPr>
-      <p:sp>
-        <p:nvSpPr>
-          <p:cNvPr id="2" name="Shape 0"/>
-          <p:cNvSpPr/>
-          <p:nvPr/>
-        </p:nvSpPr>
-        <p:spPr>
-          <a:xfrm>
-            <a:off x="0" y="0"/>
-            <a:ext cx="3794760" cy="5143500"/>
-          </a:xfrm>
-          <a:prstGeom prst="rect">
-            <a:avLst/>
-          </a:prstGeom>
-          <a:solidFill>
-            <a:srgbClr val="0F3D6E"/>
-          </a:solidFill>
-          <a:ln w="12700">
-            <a:solidFill>
-              <a:srgbClr val="0F3D6E"/>
-            </a:solidFill>
-            <a:prstDash val="solid"/>
-          </a:ln>
-        </p:spPr>
-      </p:sp>
-      <p:sp>
-        <p:nvSpPr>
-          <p:cNvPr id="3" name="Shape 1"/>
-          <p:cNvSpPr/>
-          <p:nvPr/>
-        </p:nvSpPr>
-        <p:spPr>
-          <a:xfrm>
-            <a:off x="3794760" y="0"/>
-            <a:ext cx="50292" cy="5143500"/>
-          </a:xfrm>
-          <a:prstGeom prst="rect">
-            <a:avLst/>
-          </a:prstGeom>
-          <a:solidFill>
-            <a:srgbClr val="5BA4CF"/>
-          </a:solidFill>
-          <a:ln w="12700">
-            <a:solidFill>
-              <a:srgbClr val="5BA4CF"/>
-            </a:solidFill>
-            <a:prstDash val="solid"/>
-          </a:ln>
-        </p:spPr>
-      </p:sp>
-      <p:sp>
-        <p:nvSpPr>
-          <p:cNvPr id="4" name="Shape 2"/>
-          <p:cNvSpPr/>
-          <p:nvPr/>
-        </p:nvSpPr>
-        <p:spPr>
-          <a:xfrm>
-            <a:off x="91440" y="2651760"/>
-            <a:ext cx="3566160" cy="3566160"/>
-          </a:xfrm>
-          <a:prstGeom prst="line">
-            <a:avLst/>
-          </a:prstGeom>
-          <a:solidFill>
-            <a:srgbClr val="2176AE">
-              <a:alpha val="17000"/>
-            </a:srgbClr>
-          </a:solidFill>
-          <a:ln w="12700">
-            <a:solidFill>
-              <a:srgbClr val="C8DEF5">
-                <a:alpha val="28000"/>
-              </a:srgbClr>
-            </a:solidFill>
-            <a:prstDash val="solid"/>
-          </a:ln>
-        </p:spPr>
-      </p:sp>
-      <p:sp>
-        <p:nvSpPr>
-          <p:cNvPr id="5" name="Text 3"/>
-          <p:cNvSpPr/>
-          <p:nvPr/>
-        </p:nvSpPr>
-        <p:spPr>
-          <a:xfrm>
-            <a:off x="320040" y="292608"/>
-            <a:ext cx="3337560" cy="1481328"/>
-          </a:xfrm>
-          <a:prstGeom prst="rect">
-            <a:avLst/>
-          </a:prstGeom>
-          <a:noFill/>
-          <a:ln/>
-        </p:spPr>
-        <p:txBody>
-          <a:bodyPr wrap="square" lIns="0" tIns="0" rIns="0" bIns="0" rtlCol="0" anchor="ctr"/>
-          <a:lstStyle/>
-          <a:p>
-            <a:pPr marL="0" indent="0">
-              <a:lnSpc>
-                <a:spcPct val="108000"/>
-              </a:lnSpc>
-              <a:buNone/>
-            </a:pPr>
-            <a:r>
-              <a:rPr lang="en-US" sz="3000" b="1" dirty="0">
-                <a:solidFill>
-                  <a:srgbClr val="FFFFFF"/>
-                </a:solidFill>
-                <a:latin typeface="Trebuchet MS" pitchFamily="34" charset="0"/>
-                <a:ea typeface="Trebuchet MS" pitchFamily="34" charset="-122"/>
-                <a:cs typeface="Trebuchet MS" pitchFamily="34" charset="-120"/>
-              </a:rPr>
-              <a:t>Módulo 1</a:t>
-            </a:r>
-            <a:endParaRPr lang="en-US" sz="3000" dirty="0"/>
-          </a:p>
-          <a:p>
-            <a:pPr marL="0" indent="0">
-              <a:lnSpc>
-                <a:spcPct val="108000"/>
-              </a:lnSpc>
-              <a:buNone/>
-            </a:pPr>
-            <a:r>
-              <a:rPr lang="en-US" sz="3000" b="1" dirty="0">
-                <a:solidFill>
-                  <a:srgbClr val="FFFFFF"/>
-                </a:solidFill>
-                <a:latin typeface="Trebuchet MS" pitchFamily="34" charset="0"/>
-                <a:ea typeface="Trebuchet MS" pitchFamily="34" charset="-122"/>
-                <a:cs typeface="Trebuchet MS" pitchFamily="34" charset="-120"/>
-              </a:rPr>
-              <a:t>completado ✓</a:t>
-            </a:r>
-            <a:endParaRPr lang="en-US" sz="3000" dirty="0"/>
-          </a:p>
-        </p:txBody>
-      </p:sp>
-      <p:sp>
-        <p:nvSpPr>
-          <p:cNvPr id="6" name="Shape 4"/>
-          <p:cNvSpPr/>
-          <p:nvPr/>
-        </p:nvSpPr>
-        <p:spPr>
-          <a:xfrm>
-            <a:off x="320040" y="1874520"/>
-            <a:ext cx="2286000" cy="0"/>
-          </a:xfrm>
-          <a:prstGeom prst="line">
-            <a:avLst/>
-          </a:prstGeom>
-          <a:noFill/>
-          <a:ln w="19050">
-            <a:solidFill>
-              <a:srgbClr val="5BA4CF"/>
-            </a:solidFill>
-            <a:prstDash val="solid"/>
-          </a:ln>
-        </p:spPr>
-      </p:sp>
-      <p:sp>
-        <p:nvSpPr>
-          <p:cNvPr id="7" name="Text 5"/>
-          <p:cNvSpPr/>
-          <p:nvPr/>
-        </p:nvSpPr>
-        <p:spPr>
-          <a:xfrm>
-            <a:off x="320040" y="2029968"/>
-            <a:ext cx="3337560" cy="256032"/>
-          </a:xfrm>
-          <a:prstGeom prst="rect">
-            <a:avLst/>
-          </a:prstGeom>
-          <a:noFill/>
-          <a:ln/>
-        </p:spPr>
-        <p:txBody>
-          <a:bodyPr wrap="square" lIns="0" tIns="0" rIns="0" bIns="0" rtlCol="0" anchor="ctr"/>
-          <a:lstStyle/>
-          <a:p>
-            <a:pPr marL="0" indent="0">
-              <a:buNone/>
-            </a:pPr>
-            <a:r>
-              <a:rPr lang="en-US" sz="1100" b="1" dirty="0">
-                <a:solidFill>
-                  <a:srgbClr val="5BA4CF"/>
-                </a:solidFill>
-                <a:latin typeface="Calibri" pitchFamily="34" charset="0"/>
-                <a:ea typeface="Calibri" pitchFamily="34" charset="-122"/>
-                <a:cs typeface="Calibri" pitchFamily="34" charset="-120"/>
-              </a:rPr>
-              <a:t>Regresión Lineal</a:t>
-            </a:r>
-            <a:endParaRPr lang="en-US" sz="1100" dirty="0"/>
-          </a:p>
-        </p:txBody>
-      </p:sp>
-      <p:sp>
-        <p:nvSpPr>
-          <p:cNvPr id="8" name="Text 6"/>
-          <p:cNvSpPr/>
-          <p:nvPr/>
-        </p:nvSpPr>
-        <p:spPr>
-          <a:xfrm>
-            <a:off x="320040" y="2322576"/>
-            <a:ext cx="3337560" cy="256032"/>
-          </a:xfrm>
-          <a:prstGeom prst="rect">
-            <a:avLst/>
-          </a:prstGeom>
-          <a:noFill/>
-          <a:ln/>
-        </p:spPr>
-        <p:txBody>
-          <a:bodyPr wrap="square" lIns="0" tIns="0" rIns="0" bIns="0" rtlCol="0" anchor="ctr"/>
-          <a:lstStyle/>
-          <a:p>
-            <a:pPr marL="0" indent="0">
-              <a:buNone/>
-            </a:pPr>
-            <a:r>
-              <a:rPr lang="en-US" sz="1000" dirty="0">
-                <a:solidFill>
-                  <a:srgbClr val="C8DEF5"/>
-                </a:solidFill>
-                <a:latin typeface="Calibri" pitchFamily="34" charset="0"/>
-                <a:ea typeface="Calibri" pitchFamily="34" charset="-122"/>
-                <a:cs typeface="Calibri" pitchFamily="34" charset="-120"/>
-              </a:rPr>
-              <a:t>Docente: Josef Rodriguez</a:t>
-            </a:r>
-            <a:endParaRPr lang="en-US" sz="1000" dirty="0"/>
-          </a:p>
-        </p:txBody>
-      </p:sp>
-      <p:sp>
-        <p:nvSpPr>
-          <p:cNvPr id="9" name="Text 7"/>
-          <p:cNvSpPr/>
-          <p:nvPr/>
-        </p:nvSpPr>
-        <p:spPr>
-          <a:xfrm>
-            <a:off x="4069080" y="274320"/>
-            <a:ext cx="4754880" cy="384048"/>
-          </a:xfrm>
-          <a:prstGeom prst="rect">
-            <a:avLst/>
-          </a:prstGeom>
-          <a:noFill/>
-          <a:ln/>
-        </p:spPr>
-        <p:txBody>
-          <a:bodyPr wrap="square" lIns="0" tIns="0" rIns="0" bIns="0" rtlCol="0" anchor="ctr"/>
-          <a:lstStyle/>
-          <a:p>
-            <a:pPr marL="0" indent="0">
-              <a:buNone/>
-            </a:pPr>
-            <a:r>
-              <a:rPr lang="en-US" sz="1400" b="1" dirty="0">
-                <a:solidFill>
-                  <a:srgbClr val="1A2B3C"/>
-                </a:solidFill>
-                <a:latin typeface="Trebuchet MS" pitchFamily="34" charset="0"/>
-                <a:ea typeface="Trebuchet MS" pitchFamily="34" charset="-122"/>
-                <a:cs typeface="Trebuchet MS" pitchFamily="34" charset="-120"/>
-              </a:rPr>
-              <a:t>3 takeaways del módulo</a:t>
-            </a:r>
-            <a:endParaRPr lang="en-US" sz="1400" dirty="0"/>
-          </a:p>
-        </p:txBody>
-      </p:sp>
-      <p:sp>
-        <p:nvSpPr>
-          <p:cNvPr id="10" name="Shape 8"/>
-          <p:cNvSpPr/>
-          <p:nvPr/>
-        </p:nvSpPr>
-        <p:spPr>
-          <a:xfrm>
-            <a:off x="4069080" y="731520"/>
-            <a:ext cx="4754880" cy="0"/>
-          </a:xfrm>
-          <a:prstGeom prst="line">
-            <a:avLst/>
-          </a:prstGeom>
-          <a:noFill/>
-          <a:ln w="9525">
-            <a:solidFill>
-              <a:srgbClr val="DDE8F2"/>
-            </a:solidFill>
-            <a:prstDash val="solid"/>
-          </a:ln>
-        </p:spPr>
-      </p:sp>
-      <p:sp>
-        <p:nvSpPr>
-          <p:cNvPr id="11" name="Shape 9"/>
-          <p:cNvSpPr/>
-          <p:nvPr/>
-        </p:nvSpPr>
-        <p:spPr>
-          <a:xfrm>
-            <a:off x="4069080" y="914400"/>
-            <a:ext cx="4754880" cy="1115568"/>
-          </a:xfrm>
-          <a:prstGeom prst="rect">
-            <a:avLst/>
-          </a:prstGeom>
-          <a:solidFill>
-            <a:srgbClr val="FFFFFF"/>
-          </a:solidFill>
-          <a:ln w="6350">
-            <a:solidFill>
-              <a:srgbClr val="DDE8F2"/>
-            </a:solidFill>
-            <a:prstDash val="solid"/>
-          </a:ln>
-          <a:effectLst>
-            <a:outerShdw blurRad="101600" dist="38100" dir="8100000" algn="bl" rotWithShape="0">
-              <a:srgbClr val="9EAFC0">
-                <a:alpha val="13000"/>
-              </a:srgbClr>
-            </a:outerShdw>
-          </a:effectLst>
-        </p:spPr>
-      </p:sp>
-      <p:sp>
-        <p:nvSpPr>
-          <p:cNvPr id="12" name="Shape 10"/>
-          <p:cNvSpPr/>
-          <p:nvPr/>
-        </p:nvSpPr>
-        <p:spPr>
-          <a:xfrm>
-            <a:off x="4069080" y="914400"/>
-            <a:ext cx="4754880" cy="50292"/>
-          </a:xfrm>
-          <a:prstGeom prst="rect">
-            <a:avLst/>
-          </a:prstGeom>
-          <a:solidFill>
-            <a:srgbClr val="0F3D6E"/>
-          </a:solidFill>
-          <a:ln w="12700">
-            <a:solidFill>
-              <a:srgbClr val="0F3D6E"/>
-            </a:solidFill>
-            <a:prstDash val="solid"/>
-          </a:ln>
-        </p:spPr>
-      </p:sp>
-      <p:sp>
-        <p:nvSpPr>
-          <p:cNvPr id="13" name="Shape 11"/>
-          <p:cNvSpPr/>
-          <p:nvPr/>
-        </p:nvSpPr>
-        <p:spPr>
-          <a:xfrm>
-            <a:off x="4224528" y="1005840"/>
-            <a:ext cx="475488" cy="475488"/>
-          </a:xfrm>
-          <a:prstGeom prst="rect">
-            <a:avLst/>
-          </a:prstGeom>
-          <a:solidFill>
-            <a:srgbClr val="0F3D6E"/>
-          </a:solidFill>
-          <a:ln w="12700">
-            <a:solidFill>
-              <a:srgbClr val="0F3D6E"/>
-            </a:solidFill>
-            <a:prstDash val="solid"/>
-          </a:ln>
-        </p:spPr>
-      </p:sp>
-      <p:sp>
-        <p:nvSpPr>
-          <p:cNvPr id="14" name="Text 12"/>
-          <p:cNvSpPr/>
-          <p:nvPr/>
-        </p:nvSpPr>
-        <p:spPr>
-          <a:xfrm>
-            <a:off x="4224528" y="1005840"/>
-            <a:ext cx="475488" cy="475488"/>
-          </a:xfrm>
-          <a:prstGeom prst="rect">
-            <a:avLst/>
-          </a:prstGeom>
-          <a:noFill/>
-          <a:ln/>
-        </p:spPr>
-        <p:txBody>
-          <a:bodyPr wrap="square" lIns="0" tIns="0" rIns="0" bIns="0" rtlCol="0" anchor="ctr"/>
-          <a:lstStyle/>
-          <a:p>
-            <a:pPr marL="0" indent="0" algn="ctr">
-              <a:buNone/>
-            </a:pPr>
-            <a:r>
-              <a:rPr lang="en-US" sz="1400" b="1" dirty="0">
-                <a:solidFill>
-                  <a:srgbClr val="FFFFFF"/>
-                </a:solidFill>
-                <a:latin typeface="Trebuchet MS" pitchFamily="34" charset="0"/>
-                <a:ea typeface="Trebuchet MS" pitchFamily="34" charset="-122"/>
-                <a:cs typeface="Trebuchet MS" pitchFamily="34" charset="-120"/>
-              </a:rPr>
-              <a:t>01</a:t>
-            </a:r>
-            <a:endParaRPr lang="en-US" sz="1400" dirty="0"/>
-          </a:p>
-        </p:txBody>
-      </p:sp>
-      <p:sp>
-        <p:nvSpPr>
-          <p:cNvPr id="15" name="Text 13"/>
-          <p:cNvSpPr/>
-          <p:nvPr/>
-        </p:nvSpPr>
-        <p:spPr>
-          <a:xfrm>
-            <a:off x="4828032" y="1024128"/>
-            <a:ext cx="3840480" cy="292608"/>
-          </a:xfrm>
-          <a:prstGeom prst="rect">
-            <a:avLst/>
-          </a:prstGeom>
-          <a:noFill/>
-          <a:ln/>
-        </p:spPr>
-        <p:txBody>
-          <a:bodyPr wrap="square" lIns="0" tIns="0" rIns="0" bIns="0" rtlCol="0" anchor="ctr"/>
-          <a:lstStyle/>
-          <a:p>
-            <a:pPr marL="0" indent="0">
-              <a:buNone/>
-            </a:pPr>
-            <a:r>
-              <a:rPr lang="en-US" sz="1200" b="1" dirty="0">
-                <a:solidFill>
-                  <a:srgbClr val="1A2B3C"/>
-                </a:solidFill>
-                <a:latin typeface="Calibri" pitchFamily="34" charset="0"/>
-                <a:ea typeface="Calibri" pitchFamily="34" charset="-122"/>
-                <a:cs typeface="Calibri" pitchFamily="34" charset="-120"/>
-              </a:rPr>
-              <a:t>El flujo completo</a:t>
-            </a:r>
-            <a:endParaRPr lang="en-US" sz="1200" dirty="0"/>
-          </a:p>
-        </p:txBody>
-      </p:sp>
-      <p:sp>
-        <p:nvSpPr>
-          <p:cNvPr id="16" name="Text 14"/>
-          <p:cNvSpPr/>
-          <p:nvPr/>
-        </p:nvSpPr>
-        <p:spPr>
-          <a:xfrm>
-            <a:off x="4828032" y="1371600"/>
-            <a:ext cx="3840480" cy="566928"/>
-          </a:xfrm>
-          <a:prstGeom prst="rect">
-            <a:avLst/>
-          </a:prstGeom>
-          <a:noFill/>
-          <a:ln/>
-        </p:spPr>
-        <p:txBody>
-          <a:bodyPr wrap="square" lIns="0" tIns="0" rIns="0" bIns="0" rtlCol="0" anchor="ctr"/>
-          <a:lstStyle/>
-          <a:p>
-            <a:pPr marL="0" indent="0">
-              <a:lnSpc>
-                <a:spcPct val="125000"/>
-              </a:lnSpc>
-              <a:buNone/>
-            </a:pPr>
-            <a:r>
-              <a:rPr lang="en-US" sz="950" dirty="0">
-                <a:solidFill>
-                  <a:srgbClr val="7A92A8"/>
-                </a:solidFill>
-                <a:latin typeface="Calibri" pitchFamily="34" charset="0"/>
-                <a:ea typeface="Calibri" pitchFamily="34" charset="-122"/>
-                <a:cs typeface="Calibri" pitchFamily="34" charset="-120"/>
-              </a:rPr>
-              <a:t>Datos → X con intercepto → verificar rango → β̂ = (XᵀX)⁻¹Xᵀy → diagnosticar → reportar</a:t>
-            </a:r>
-            <a:endParaRPr lang="en-US" sz="950" dirty="0"/>
-          </a:p>
-        </p:txBody>
-      </p:sp>
-      <p:sp>
-        <p:nvSpPr>
-          <p:cNvPr id="17" name="Shape 15"/>
-          <p:cNvSpPr/>
-          <p:nvPr/>
-        </p:nvSpPr>
-        <p:spPr>
-          <a:xfrm>
-            <a:off x="4069080" y="2176272"/>
-            <a:ext cx="4754880" cy="1115568"/>
-          </a:xfrm>
-          <a:prstGeom prst="rect">
-            <a:avLst/>
-          </a:prstGeom>
-          <a:solidFill>
-            <a:srgbClr val="FFFFFF"/>
-          </a:solidFill>
-          <a:ln w="6350">
-            <a:solidFill>
-              <a:srgbClr val="DDE8F2"/>
-            </a:solidFill>
-            <a:prstDash val="solid"/>
-          </a:ln>
-          <a:effectLst>
-            <a:outerShdw blurRad="101600" dist="38100" dir="8100000" algn="bl" rotWithShape="0">
-              <a:srgbClr val="9EAFC0">
-                <a:alpha val="13000"/>
-              </a:srgbClr>
-            </a:outerShdw>
-          </a:effectLst>
-        </p:spPr>
-      </p:sp>
-      <p:sp>
-        <p:nvSpPr>
-          <p:cNvPr id="18" name="Shape 16"/>
-          <p:cNvSpPr/>
-          <p:nvPr/>
-        </p:nvSpPr>
-        <p:spPr>
-          <a:xfrm>
-            <a:off x="4069080" y="2176272"/>
-            <a:ext cx="4754880" cy="50292"/>
-          </a:xfrm>
-          <a:prstGeom prst="rect">
-            <a:avLst/>
-          </a:prstGeom>
-          <a:solidFill>
-            <a:srgbClr val="2176AE"/>
-          </a:solidFill>
-          <a:ln w="12700">
-            <a:solidFill>
-              <a:srgbClr val="2176AE"/>
-            </a:solidFill>
-            <a:prstDash val="solid"/>
-          </a:ln>
-        </p:spPr>
-      </p:sp>
-      <p:sp>
-        <p:nvSpPr>
-          <p:cNvPr id="19" name="Shape 17"/>
-          <p:cNvSpPr/>
-          <p:nvPr/>
-        </p:nvSpPr>
-        <p:spPr>
-          <a:xfrm>
-            <a:off x="4224528" y="2267712"/>
-            <a:ext cx="475488" cy="475488"/>
-          </a:xfrm>
-          <a:prstGeom prst="rect">
-            <a:avLst/>
-          </a:prstGeom>
-          <a:solidFill>
-            <a:srgbClr val="2176AE"/>
-          </a:solidFill>
-          <a:ln w="12700">
-            <a:solidFill>
-              <a:srgbClr val="2176AE"/>
-            </a:solidFill>
-            <a:prstDash val="solid"/>
-          </a:ln>
-        </p:spPr>
-      </p:sp>
-      <p:sp>
-        <p:nvSpPr>
-          <p:cNvPr id="20" name="Text 18"/>
-          <p:cNvSpPr/>
-          <p:nvPr/>
-        </p:nvSpPr>
-        <p:spPr>
-          <a:xfrm>
-            <a:off x="4224528" y="2267712"/>
-            <a:ext cx="475488" cy="475488"/>
-          </a:xfrm>
-          <a:prstGeom prst="rect">
-            <a:avLst/>
-          </a:prstGeom>
-          <a:noFill/>
-          <a:ln/>
-        </p:spPr>
-        <p:txBody>
-          <a:bodyPr wrap="square" lIns="0" tIns="0" rIns="0" bIns="0" rtlCol="0" anchor="ctr"/>
-          <a:lstStyle/>
-          <a:p>
-            <a:pPr marL="0" indent="0" algn="ctr">
-              <a:buNone/>
-            </a:pPr>
-            <a:r>
-              <a:rPr lang="en-US" sz="1400" b="1" dirty="0">
-                <a:solidFill>
-                  <a:srgbClr val="FFFFFF"/>
-                </a:solidFill>
-                <a:latin typeface="Trebuchet MS" pitchFamily="34" charset="0"/>
-                <a:ea typeface="Trebuchet MS" pitchFamily="34" charset="-122"/>
-                <a:cs typeface="Trebuchet MS" pitchFamily="34" charset="-120"/>
-              </a:rPr>
-              <a:t>02</a:t>
-            </a:r>
-            <a:endParaRPr lang="en-US" sz="1400" dirty="0"/>
-          </a:p>
-        </p:txBody>
-      </p:sp>
-      <p:sp>
-        <p:nvSpPr>
-          <p:cNvPr id="21" name="Text 19"/>
-          <p:cNvSpPr/>
-          <p:nvPr/>
-        </p:nvSpPr>
-        <p:spPr>
-          <a:xfrm>
-            <a:off x="4828032" y="2286000"/>
-            <a:ext cx="3840480" cy="292608"/>
-          </a:xfrm>
-          <a:prstGeom prst="rect">
-            <a:avLst/>
-          </a:prstGeom>
-          <a:noFill/>
-          <a:ln/>
-        </p:spPr>
-        <p:txBody>
-          <a:bodyPr wrap="square" lIns="0" tIns="0" rIns="0" bIns="0" rtlCol="0" anchor="ctr"/>
-          <a:lstStyle/>
-          <a:p>
-            <a:pPr marL="0" indent="0">
-              <a:buNone/>
-            </a:pPr>
-            <a:r>
-              <a:rPr lang="en-US" sz="1200" b="1" dirty="0">
-                <a:solidFill>
-                  <a:srgbClr val="1A2B3C"/>
-                </a:solidFill>
-                <a:latin typeface="Calibri" pitchFamily="34" charset="0"/>
-                <a:ea typeface="Calibri" pitchFamily="34" charset="-122"/>
-                <a:cs typeface="Calibri" pitchFamily="34" charset="-120"/>
-              </a:rPr>
-              <a:t>Diagnóstico es obligatorio</a:t>
-            </a:r>
-            <a:endParaRPr lang="en-US" sz="1200" dirty="0"/>
-          </a:p>
-        </p:txBody>
-      </p:sp>
-      <p:sp>
-        <p:nvSpPr>
-          <p:cNvPr id="22" name="Text 20"/>
-          <p:cNvSpPr/>
-          <p:nvPr/>
-        </p:nvSpPr>
-        <p:spPr>
-          <a:xfrm>
-            <a:off x="4828032" y="2633472"/>
-            <a:ext cx="3840480" cy="566928"/>
-          </a:xfrm>
-          <a:prstGeom prst="rect">
-            <a:avLst/>
-          </a:prstGeom>
-          <a:noFill/>
-          <a:ln/>
-        </p:spPr>
-        <p:txBody>
-          <a:bodyPr wrap="square" lIns="0" tIns="0" rIns="0" bIns="0" rtlCol="0" anchor="ctr"/>
-          <a:lstStyle/>
-          <a:p>
-            <a:pPr marL="0" indent="0">
-              <a:lnSpc>
-                <a:spcPct val="125000"/>
-              </a:lnSpc>
-              <a:buNone/>
-            </a:pPr>
-            <a:r>
-              <a:rPr lang="en-US" sz="950" dirty="0">
-                <a:solidFill>
-                  <a:srgbClr val="7A92A8"/>
-                </a:solidFill>
-                <a:latin typeface="Calibri" pitchFamily="34" charset="0"/>
-                <a:ea typeface="Calibri" pitchFamily="34" charset="-122"/>
-                <a:cs typeface="Calibri" pitchFamily="34" charset="-120"/>
-              </a:rPr>
-              <a:t>Sin los 4 gráficos + 3 tests no podés concluir que el modelo es válido</a:t>
-            </a:r>
-            <a:endParaRPr lang="en-US" sz="950" dirty="0"/>
-          </a:p>
-        </p:txBody>
-      </p:sp>
-      <p:sp>
-        <p:nvSpPr>
-          <p:cNvPr id="23" name="Shape 21"/>
-          <p:cNvSpPr/>
-          <p:nvPr/>
-        </p:nvSpPr>
-        <p:spPr>
-          <a:xfrm>
-            <a:off x="4069080" y="3438144"/>
-            <a:ext cx="4754880" cy="1115568"/>
-          </a:xfrm>
-          <a:prstGeom prst="rect">
-            <a:avLst/>
-          </a:prstGeom>
-          <a:solidFill>
-            <a:srgbClr val="FFFFFF"/>
-          </a:solidFill>
-          <a:ln w="6350">
-            <a:solidFill>
-              <a:srgbClr val="DDE8F2"/>
-            </a:solidFill>
-            <a:prstDash val="solid"/>
-          </a:ln>
-          <a:effectLst>
-            <a:outerShdw blurRad="101600" dist="38100" dir="8100000" algn="bl" rotWithShape="0">
-              <a:srgbClr val="9EAFC0">
-                <a:alpha val="13000"/>
-              </a:srgbClr>
-            </a:outerShdw>
-          </a:effectLst>
-        </p:spPr>
-      </p:sp>
-      <p:sp>
-        <p:nvSpPr>
-          <p:cNvPr id="24" name="Shape 22"/>
-          <p:cNvSpPr/>
-          <p:nvPr/>
-        </p:nvSpPr>
-        <p:spPr>
-          <a:xfrm>
-            <a:off x="4069080" y="3438144"/>
-            <a:ext cx="4754880" cy="50292"/>
-          </a:xfrm>
-          <a:prstGeom prst="rect">
-            <a:avLst/>
-          </a:prstGeom>
-          <a:solidFill>
-            <a:srgbClr val="5BA4CF"/>
-          </a:solidFill>
-          <a:ln w="12700">
-            <a:solidFill>
-              <a:srgbClr val="5BA4CF"/>
-            </a:solidFill>
-            <a:prstDash val="solid"/>
-          </a:ln>
-        </p:spPr>
-      </p:sp>
-      <p:sp>
-        <p:nvSpPr>
-          <p:cNvPr id="25" name="Shape 23"/>
-          <p:cNvSpPr/>
-          <p:nvPr/>
-        </p:nvSpPr>
-        <p:spPr>
-          <a:xfrm>
-            <a:off x="4224528" y="3529584"/>
-            <a:ext cx="475488" cy="475488"/>
-          </a:xfrm>
-          <a:prstGeom prst="rect">
-            <a:avLst/>
-          </a:prstGeom>
-          <a:solidFill>
-            <a:srgbClr val="5BA4CF"/>
-          </a:solidFill>
-          <a:ln w="12700">
-            <a:solidFill>
-              <a:srgbClr val="5BA4CF"/>
-            </a:solidFill>
-            <a:prstDash val="solid"/>
-          </a:ln>
-        </p:spPr>
-      </p:sp>
-      <p:sp>
-        <p:nvSpPr>
-          <p:cNvPr id="26" name="Text 24"/>
-          <p:cNvSpPr/>
-          <p:nvPr/>
-        </p:nvSpPr>
-        <p:spPr>
-          <a:xfrm>
-            <a:off x="4224528" y="3529584"/>
-            <a:ext cx="475488" cy="475488"/>
-          </a:xfrm>
-          <a:prstGeom prst="rect">
-            <a:avLst/>
-          </a:prstGeom>
-          <a:noFill/>
-          <a:ln/>
-        </p:spPr>
-        <p:txBody>
-          <a:bodyPr wrap="square" lIns="0" tIns="0" rIns="0" bIns="0" rtlCol="0" anchor="ctr"/>
-          <a:lstStyle/>
-          <a:p>
-            <a:pPr marL="0" indent="0" algn="ctr">
-              <a:buNone/>
-            </a:pPr>
-            <a:r>
-              <a:rPr lang="en-US" sz="1400" b="1" dirty="0">
-                <a:solidFill>
-                  <a:srgbClr val="FFFFFF"/>
-                </a:solidFill>
-                <a:latin typeface="Trebuchet MS" pitchFamily="34" charset="0"/>
-                <a:ea typeface="Trebuchet MS" pitchFamily="34" charset="-122"/>
-                <a:cs typeface="Trebuchet MS" pitchFamily="34" charset="-120"/>
-              </a:rPr>
-              <a:t>03</a:t>
-            </a:r>
-            <a:endParaRPr lang="en-US" sz="1400" dirty="0"/>
-          </a:p>
-        </p:txBody>
-      </p:sp>
-      <p:sp>
-        <p:nvSpPr>
-          <p:cNvPr id="27" name="Text 25"/>
-          <p:cNvSpPr/>
-          <p:nvPr/>
-        </p:nvSpPr>
-        <p:spPr>
-          <a:xfrm>
-            <a:off x="4828032" y="3547872"/>
-            <a:ext cx="3840480" cy="292608"/>
-          </a:xfrm>
-          <a:prstGeom prst="rect">
-            <a:avLst/>
-          </a:prstGeom>
-          <a:noFill/>
-          <a:ln/>
-        </p:spPr>
-        <p:txBody>
-          <a:bodyPr wrap="square" lIns="0" tIns="0" rIns="0" bIns="0" rtlCol="0" anchor="ctr"/>
-          <a:lstStyle/>
-          <a:p>
-            <a:pPr marL="0" indent="0">
-              <a:buNone/>
-            </a:pPr>
-            <a:r>
-              <a:rPr lang="en-US" sz="1200" b="1" dirty="0">
-                <a:solidFill>
-                  <a:srgbClr val="1A2B3C"/>
-                </a:solidFill>
-                <a:latin typeface="Calibri" pitchFamily="34" charset="0"/>
-                <a:ea typeface="Calibri" pitchFamily="34" charset="-122"/>
-                <a:cs typeface="Calibri" pitchFamily="34" charset="-120"/>
-              </a:rPr>
-              <a:t>R²_adj + F primero, t-tests después</a:t>
-            </a:r>
-            <a:endParaRPr lang="en-US" sz="1200" dirty="0"/>
-          </a:p>
-        </p:txBody>
-      </p:sp>
-      <p:sp>
-        <p:nvSpPr>
-          <p:cNvPr id="28" name="Text 26"/>
-          <p:cNvSpPr/>
-          <p:nvPr/>
-        </p:nvSpPr>
-        <p:spPr>
-          <a:xfrm>
-            <a:off x="4828032" y="3895344"/>
-            <a:ext cx="3840480" cy="566928"/>
-          </a:xfrm>
-          <a:prstGeom prst="rect">
-            <a:avLst/>
-          </a:prstGeom>
-          <a:noFill/>
-          <a:ln/>
-        </p:spPr>
-        <p:txBody>
-          <a:bodyPr wrap="square" lIns="0" tIns="0" rIns="0" bIns="0" rtlCol="0" anchor="ctr"/>
-          <a:lstStyle/>
-          <a:p>
-            <a:pPr marL="0" indent="0">
-              <a:lnSpc>
-                <a:spcPct val="125000"/>
-              </a:lnSpc>
-              <a:buNone/>
-            </a:pPr>
-            <a:r>
-              <a:rPr lang="en-US" sz="950" dirty="0">
-                <a:solidFill>
-                  <a:srgbClr val="7A92A8"/>
-                </a:solidFill>
-                <a:latin typeface="Calibri" pitchFamily="34" charset="0"/>
-                <a:ea typeface="Calibri" pitchFamily="34" charset="-122"/>
-                <a:cs typeface="Calibri" pitchFamily="34" charset="-120"/>
-              </a:rPr>
-              <a:t>Primero ver si el modelo global tiene sentido. Luego interpretar coeficientes.</a:t>
-            </a:r>
-            <a:endParaRPr lang="en-US" sz="950" dirty="0"/>
-          </a:p>
-        </p:txBody>
-      </p:sp>
-      <p:sp>
-        <p:nvSpPr>
-          <p:cNvPr id="29" name="Shape 27"/>
-          <p:cNvSpPr/>
-          <p:nvPr/>
-        </p:nvSpPr>
-        <p:spPr>
-          <a:xfrm>
-            <a:off x="4069080" y="4645152"/>
-            <a:ext cx="4754880" cy="347472"/>
-          </a:xfrm>
-          <a:prstGeom prst="rect">
-            <a:avLst/>
-          </a:prstGeom>
-          <a:solidFill>
-            <a:srgbClr val="EAF2FB"/>
-          </a:solidFill>
-          <a:ln w="6350">
-            <a:solidFill>
-              <a:srgbClr val="C8DEF5"/>
-            </a:solidFill>
-            <a:prstDash val="solid"/>
-          </a:ln>
-        </p:spPr>
-      </p:sp>
-      <p:sp>
-        <p:nvSpPr>
-          <p:cNvPr id="30" name="Text 28"/>
-          <p:cNvSpPr/>
-          <p:nvPr/>
-        </p:nvSpPr>
-        <p:spPr>
-          <a:xfrm>
-            <a:off x="4224528" y="4700016"/>
-            <a:ext cx="4462272" cy="237744"/>
-          </a:xfrm>
-          <a:prstGeom prst="rect">
-            <a:avLst/>
-          </a:prstGeom>
-          <a:noFill/>
-          <a:ln/>
-        </p:spPr>
-        <p:txBody>
-          <a:bodyPr wrap="square" lIns="0" tIns="0" rIns="0" bIns="0" rtlCol="0" anchor="ctr"/>
-          <a:lstStyle/>
-          <a:p>
-            <a:pPr marL="0" indent="0">
-              <a:buNone/>
-            </a:pPr>
-            <a:r>
-              <a:rPr lang="en-US" sz="900" dirty="0">
-                <a:solidFill>
-                  <a:srgbClr val="2176AE"/>
-                </a:solidFill>
-                <a:latin typeface="Calibri" pitchFamily="34" charset="0"/>
-                <a:ea typeface="Calibri" pitchFamily="34" charset="-122"/>
-                <a:cs typeface="Calibri" pitchFamily="34" charset="-120"/>
-              </a:rPr>
-              <a:t>Próximo módulo → Regresión Logística: Clase 5 · Formulación desde el GLM · Función logit · Log-verosimilitud</a:t>
-            </a:r>
-            <a:endParaRPr lang="en-US" sz="900" dirty="0"/>
           </a:p>
         </p:txBody>
       </p:sp>
